--- a/deck/ETS_ML2_Belajar_dengan_Label_Mahal.pptx
+++ b/deck/ETS_ML2_Belajar_dengan_Label_Mahal.pptx
@@ -123,7 +123,7 @@
   <p:extLst>
     <p:ext uri="{521415D9-36F7-43E2-AB2F-B90AF26B5E84}">
       <p14:sectionLst xmlns:p14="http://schemas.microsoft.com/office/powerpoint/2010/main">
-        <p14:section name="Pembuka" id="{f7937824-d642-3410-3a2d-c6821b3cdbb7}">
+        <p14:section name="Pembuka" id="{7d87b0ef-d2b8-29fc-13b3-51035d61638f}">
           <p14:sldIdLst>
             <p14:sldId id="256"/>
             <p14:sldId id="257"/>
@@ -131,13 +131,13 @@
             <p14:sldId id="259"/>
           </p14:sldIdLst>
         </p14:section>
-        <p14:section name="Data &amp; validasi" id="{c6be524e-f01e-03fc-4fcc-7da24c933ca3}">
+        <p14:section name="Data &amp; validasi" id="{8571dbaa-9b6f-c3fb-ec01-dc5128766d7e}">
           <p14:sldIdLst>
             <p14:sldId id="260"/>
             <p14:sldId id="261"/>
           </p14:sldIdLst>
         </p14:section>
-        <p14:section name="Aspek ML II" id="{f27ca73d-f9a3-9f2d-1503-389acc0092cf}">
+        <p14:section name="Aspek ML II" id="{eb5113e6-9b7f-ffc5-d555-57bf5808cad0}">
           <p14:sldIdLst>
             <p14:sldId id="262"/>
             <p14:sldId id="263"/>
@@ -145,14 +145,14 @@
             <p14:sldId id="265"/>
           </p14:sldIdLst>
         </p14:section>
-        <p14:section name="Reinforcement" id="{e9260c1f-308a-25c4-633f-b89886407d2e}">
+        <p14:section name="Reinforcement" id="{a8d41e1d-af70-01ea-751a-b0e3d97a6c39}">
           <p14:sldIdLst>
             <p14:sldId id="266"/>
             <p14:sldId id="267"/>
             <p14:sldId id="268"/>
           </p14:sldIdLst>
         </p14:section>
-        <p14:section name="Diskusi" id="{11162d17-c717-aff9-ec0b-80f7d02085e7}">
+        <p14:section name="Diskusi" id="{f2ae7930-d97d-b631-1dd1-cf0d62b5c32c}">
           <p14:sldIdLst>
             <p14:sldId id="269"/>
             <p14:sldId id="270"/>
@@ -167,4999 +167,6 @@
     </p:ext>
   </p:extLst>
 </p:presentation>
-</file>
-
-<file path=ppt/charts/chart1.xml><?xml version="1.0" encoding="utf-8"?>
-<c:chartSpace xmlns:c="http://schemas.openxmlformats.org/drawingml/2006/chart" xmlns:a="http://schemas.openxmlformats.org/drawingml/2006/main" xmlns:r="http://schemas.openxmlformats.org/officeDocument/2006/relationships">
-  <c:date1904 val="0"/>
-  <c:roundedCorners val="1"/>
-  <c:chart>
-    <c:title>
-      <c:tx>
-        <c:rich>
-          <a:bodyPr/>
-          <a:lstStyle/>
-          <a:p>
-            <a:pPr>
-              <a:defRPr sz="1300" b="0" i="0" u="none" strike="noStrike">
-                <a:solidFill>
-                  <a:srgbClr val="0F3D3E"/>
-                </a:solidFill>
-                <a:latin typeface="+mn-lt"/>
-              </a:defRPr>
-            </a:pPr>
-            <a:r>
-              <a:rPr sz="1300" b="0" i="0" u="none" strike="noStrike">
-                <a:solidFill>
-                  <a:srgbClr val="0F3D3E"/>
-                </a:solidFill>
-                <a:latin typeface="+mn-lt"/>
-              </a:rPr>
-              <a:t>Augmentasi (train only) · macro-F1 LOSO 4 kelas</a:t>
-            </a:r>
-          </a:p>
-        </c:rich>
-      </c:tx>
-      <c:layout/>
-      <c:overlay val="0"/>
-    </c:title>
-    <c:autoTitleDeleted val="0"/>
-    <c:plotArea>
-      <c:layout/>
-      <c:barChart>
-        <c:barDir val="col"/>
-        <c:grouping val="clustered"/>
-        <c:varyColors val="0"/>
-        <c:ser>
-          <c:idx val="0"/>
-          <c:order val="0"/>
-          <c:tx>
-            <c:strRef>
-              <c:f>Sheet1!$B$1</c:f>
-              <c:strCache>
-                <c:ptCount val="1"/>
-                <c:pt idx="0">
-                  <c:v>LogReg</c:v>
-                </c:pt>
-              </c:strCache>
-            </c:strRef>
-          </c:tx>
-          <c:spPr>
-            <a:solidFill>
-              <a:srgbClr val="9AA5A6"/>
-            </a:solidFill>
-            <a:effectLst/>
-          </c:spPr>
-          <c:invertIfNegative val="0"/>
-          <c:dLbls>
-            <c:numFmt formatCode="0.00" sourceLinked="0"/>
-            <c:txPr>
-              <a:bodyPr/>
-              <a:lstStyle/>
-              <a:p>
-                <a:pPr>
-                  <a:defRPr b="0" i="0" strike="noStrike" sz="1100" u="none">
-                    <a:solidFill>
-                      <a:srgbClr val="16262B"/>
-                    </a:solidFill>
-                    <a:latin typeface="+mn-lt"/>
-                  </a:defRPr>
-                </a:pPr>
-              </a:p>
-            </c:txPr>
-            <c:showLegendKey val="0"/>
-            <c:showVal val="1"/>
-            <c:showCatName val="0"/>
-            <c:showSerName val="0"/>
-            <c:showPercent val="0"/>
-            <c:showBubbleSize val="0"/>
-            <c:showLeaderLines val="0"/>
-          </c:dLbls>
-          <c:cat>
-            <c:multiLvlStrRef>
-              <c:f>Sheet1!$A$2:$A$6</c:f>
-              <c:multiLvlStrCache>
-                <c:ptCount val="5"/>
-                <c:lvl>
-                  <c:pt idx="0">
-                    <c:v>tanpa</c:v>
-                  </c:pt>
-                  <c:pt idx="1">
-                    <c:v>jitter</c:v>
-                  </c:pt>
-                  <c:pt idx="2">
-                    <c:v>scaling</c:v>
-                  </c:pt>
-                  <c:pt idx="3">
-                    <c:v>jitter+scaling</c:v>
-                  </c:pt>
-                  <c:pt idx="4">
-                    <c:v>×4</c:v>
-                  </c:pt>
-                </c:lvl>
-              </c:multiLvlStrCache>
-            </c:multiLvlStrRef>
-          </c:cat>
-          <c:val>
-            <c:numRef>
-              <c:f>Sheet1!$B$2:$B$6</c:f>
-              <c:numCache>
-                <c:formatCode>General</c:formatCode>
-                <c:ptCount val="5"/>
-                <c:pt idx="0">
-                  <c:v>0.505</c:v>
-                </c:pt>
-                <c:pt idx="1">
-                  <c:v>0.516</c:v>
-                </c:pt>
-                <c:pt idx="2">
-                  <c:v>0.552</c:v>
-                </c:pt>
-                <c:pt idx="3">
-                  <c:v>0.518</c:v>
-                </c:pt>
-                <c:pt idx="4">
-                  <c:v>0.525</c:v>
-                </c:pt>
-              </c:numCache>
-            </c:numRef>
-          </c:val>
-        </c:ser>
-        <c:ser>
-          <c:idx val="1"/>
-          <c:order val="1"/>
-          <c:tx>
-            <c:strRef>
-              <c:f>Sheet1!$C$1</c:f>
-              <c:strCache>
-                <c:ptCount val="1"/>
-                <c:pt idx="0">
-                  <c:v>LightGBM</c:v>
-                </c:pt>
-              </c:strCache>
-            </c:strRef>
-          </c:tx>
-          <c:spPr>
-            <a:solidFill>
-              <a:srgbClr val="0F5257"/>
-            </a:solidFill>
-            <a:effectLst/>
-          </c:spPr>
-          <c:invertIfNegative val="0"/>
-          <c:dLbls>
-            <c:numFmt formatCode="0.00" sourceLinked="0"/>
-            <c:txPr>
-              <a:bodyPr/>
-              <a:lstStyle/>
-              <a:p>
-                <a:pPr>
-                  <a:defRPr b="0" i="0" strike="noStrike" sz="1100" u="none">
-                    <a:solidFill>
-                      <a:srgbClr val="16262B"/>
-                    </a:solidFill>
-                    <a:latin typeface="+mn-lt"/>
-                  </a:defRPr>
-                </a:pPr>
-              </a:p>
-            </c:txPr>
-            <c:showLegendKey val="0"/>
-            <c:showVal val="1"/>
-            <c:showCatName val="0"/>
-            <c:showSerName val="0"/>
-            <c:showPercent val="0"/>
-            <c:showBubbleSize val="0"/>
-            <c:showLeaderLines val="0"/>
-          </c:dLbls>
-          <c:cat>
-            <c:multiLvlStrRef>
-              <c:f>Sheet1!$A$2:$A$6</c:f>
-              <c:multiLvlStrCache>
-                <c:ptCount val="5"/>
-                <c:lvl>
-                  <c:pt idx="0">
-                    <c:v>tanpa</c:v>
-                  </c:pt>
-                  <c:pt idx="1">
-                    <c:v>jitter</c:v>
-                  </c:pt>
-                  <c:pt idx="2">
-                    <c:v>scaling</c:v>
-                  </c:pt>
-                  <c:pt idx="3">
-                    <c:v>jitter+scaling</c:v>
-                  </c:pt>
-                  <c:pt idx="4">
-                    <c:v>×4</c:v>
-                  </c:pt>
-                </c:lvl>
-              </c:multiLvlStrCache>
-            </c:multiLvlStrRef>
-          </c:cat>
-          <c:val>
-            <c:numRef>
-              <c:f>Sheet1!$C$2:$C$6</c:f>
-              <c:numCache>
-                <c:formatCode>General</c:formatCode>
-                <c:ptCount val="5"/>
-                <c:pt idx="0">
-                  <c:v>0.572</c:v>
-                </c:pt>
-                <c:pt idx="1">
-                  <c:v>0.529</c:v>
-                </c:pt>
-                <c:pt idx="2">
-                  <c:v>0.507</c:v>
-                </c:pt>
-                <c:pt idx="3">
-                  <c:v>0.521</c:v>
-                </c:pt>
-                <c:pt idx="4">
-                  <c:v>0.542</c:v>
-                </c:pt>
-              </c:numCache>
-            </c:numRef>
-          </c:val>
-        </c:ser>
-        <c:dLbls>
-          <c:numFmt formatCode="0.00" sourceLinked="0"/>
-          <c:txPr>
-            <a:bodyPr/>
-            <a:lstStyle/>
-            <a:p>
-              <a:pPr>
-                <a:defRPr b="0" i="0" strike="noStrike" sz="1100" u="none">
-                  <a:solidFill>
-                    <a:srgbClr val="16262B"/>
-                  </a:solidFill>
-                  <a:latin typeface="+mn-lt"/>
-                </a:defRPr>
-              </a:pPr>
-            </a:p>
-          </c:txPr>
-          <c:showLegendKey val="0"/>
-          <c:showVal val="1"/>
-          <c:showCatName val="0"/>
-          <c:showSerName val="0"/>
-          <c:showPercent val="0"/>
-          <c:showBubbleSize val="0"/>
-          <c:showLeaderLines val="0"/>
-        </c:dLbls>
-        <c:gapWidth val="150"/>
-        <c:overlap val="0"/>
-        <c:axId val="2094734554"/>
-        <c:axId val="2094734552"/>
-        <c:axId val="2094734556"/>
-      </c:barChart>
-      <c:catAx>
-        <c:axId val="2094734554"/>
-        <c:scaling>
-          <c:orientation val="minMax"/>
-        </c:scaling>
-        <c:delete val="0"/>
-        <c:axPos val="b"/>
-        <c:numFmt formatCode="General" sourceLinked="1"/>
-        <c:majorTickMark val="out"/>
-        <c:minorTickMark val="none"/>
-        <c:tickLblPos val="low"/>
-        <c:spPr>
-          <a:ln w="12700" cap="flat">
-            <a:solidFill>
-              <a:srgbClr val="888888"/>
-            </a:solidFill>
-            <a:prstDash val="solid"/>
-            <a:round/>
-          </a:ln>
-        </c:spPr>
-        <c:txPr>
-          <a:bodyPr/>
-          <a:lstStyle/>
-          <a:p>
-            <a:pPr>
-              <a:defRPr sz="1200" b="0" i="0" u="none" strike="noStrike">
-                <a:solidFill>
-                  <a:srgbClr val="56676A"/>
-                </a:solidFill>
-                <a:latin typeface="+mn-lt"/>
-              </a:defRPr>
-            </a:pPr>
-            <a:endParaRPr lang="en-US"/>
-          </a:p>
-        </c:txPr>
-        <c:crossAx val="2094734552"/>
-        <c:crosses val="autoZero"/>
-        <c:auto val="1"/>
-        <c:lblAlgn val="ctr"/>
-        <c:noMultiLvlLbl val="1"/>
-      </c:catAx>
-      <c:valAx>
-        <c:axId val="2094734552"/>
-        <c:scaling>
-          <c:orientation val="minMax"/>
-          <c:max val="0.7"/>
-          <c:min val="0"/>
-        </c:scaling>
-        <c:delete val="0"/>
-        <c:axPos val="l"/>
-        <c:majorGridlines>
-          <c:spPr>
-            <a:ln w="9525" cap="flat">
-              <a:solidFill>
-                <a:srgbClr val="E1E8E6"/>
-              </a:solidFill>
-              <a:prstDash val="solid"/>
-              <a:round/>
-            </a:ln>
-          </c:spPr>
-        </c:majorGridlines>
-        <c:numFmt formatCode="General" sourceLinked="0"/>
-        <c:majorTickMark val="out"/>
-        <c:minorTickMark val="none"/>
-        <c:tickLblPos val="nextTo"/>
-        <c:spPr>
-          <a:ln w="12700" cap="flat">
-            <a:solidFill>
-              <a:srgbClr val="888888"/>
-            </a:solidFill>
-            <a:prstDash val="solid"/>
-            <a:round/>
-          </a:ln>
-        </c:spPr>
-        <c:txPr>
-          <a:bodyPr/>
-          <a:lstStyle/>
-          <a:p>
-            <a:pPr>
-              <a:defRPr sz="1100" b="0" i="0" u="none" strike="noStrike">
-                <a:solidFill>
-                  <a:srgbClr val="56676A"/>
-                </a:solidFill>
-                <a:latin typeface="+mn-lt"/>
-              </a:defRPr>
-            </a:pPr>
-            <a:endParaRPr lang="en-US"/>
-          </a:p>
-        </c:txPr>
-        <c:crossAx val="2094734554"/>
-        <c:crosses val="autoZero"/>
-        <c:crossBetween val="between"/>
-      </c:valAx>
-      <c:spPr>
-        <a:noFill/>
-        <a:ln>
-          <a:noFill/>
-        </a:ln>
-        <a:effectLst/>
-      </c:spPr>
-    </c:plotArea>
-    <c:legend>
-      <c:legendPos val="b"/>
-      <c:overlay val="0"/>
-      <c:txPr>
-        <a:bodyPr/>
-        <a:lstStyle/>
-        <a:p>
-          <a:pPr>
-            <a:defRPr sz="1100">
-              <a:latin typeface="+mn-lt"/>
-              <a:cs typeface="+mn-lt"/>
-            </a:defRPr>
-          </a:pPr>
-          <a:endParaRPr lang="en-US"/>
-        </a:p>
-      </c:txPr>
-    </c:legend>
-    <c:plotVisOnly val="1"/>
-    <c:dispBlanksAs val="span"/>
-  </c:chart>
-  <c:spPr>
-    <a:noFill/>
-    <a:ln>
-      <a:noFill/>
-    </a:ln>
-    <a:effectLst/>
-  </c:spPr>
-  <c:externalData r:id="rId1">
-    <c:autoUpdate val="0"/>
-  </c:externalData>
-</c:chartSpace>
-</file>
-
-<file path=ppt/charts/chart2.xml><?xml version="1.0" encoding="utf-8"?>
-<c:chartSpace xmlns:c="http://schemas.openxmlformats.org/drawingml/2006/chart" xmlns:a="http://schemas.openxmlformats.org/drawingml/2006/main" xmlns:r="http://schemas.openxmlformats.org/officeDocument/2006/relationships">
-  <c:date1904 val="0"/>
-  <c:roundedCorners val="1"/>
-  <c:chart>
-    <c:title>
-      <c:tx>
-        <c:rich>
-          <a:bodyPr/>
-          <a:lstStyle/>
-          <a:p>
-            <a:pPr>
-              <a:defRPr sz="1300" b="0" i="0" u="none" strike="noStrike">
-                <a:solidFill>
-                  <a:srgbClr val="0F3D3E"/>
-                </a:solidFill>
-                <a:latin typeface="+mn-lt"/>
-              </a:defRPr>
-            </a:pPr>
-            <a:r>
-              <a:rPr sz="1300" b="0" i="0" u="none" strike="noStrike">
-                <a:solidFill>
-                  <a:srgbClr val="0F3D3E"/>
-                </a:solidFill>
-                <a:latin typeface="+mn-lt"/>
-              </a:rPr>
-              <a:t>Biner segar vs tidak segar · macro-F1 LOSO (5 seri)</a:t>
-            </a:r>
-          </a:p>
-        </c:rich>
-      </c:tx>
-      <c:layout/>
-      <c:overlay val="0"/>
-    </c:title>
-    <c:autoTitleDeleted val="0"/>
-    <c:plotArea>
-      <c:layout/>
-      <c:barChart>
-        <c:barDir val="col"/>
-        <c:grouping val="stacked"/>
-        <c:varyColors val="0"/>
-        <c:ser>
-          <c:idx val="0"/>
-          <c:order val="0"/>
-          <c:tx>
-            <c:strRef>
-              <c:f>Sheet1!$B$1</c:f>
-              <c:strCache>
-                <c:ptCount val="1"/>
-                <c:pt idx="0">
-                  <c:v>Model tunggal</c:v>
-                </c:pt>
-              </c:strCache>
-            </c:strRef>
-          </c:tx>
-          <c:spPr>
-            <a:solidFill>
-              <a:srgbClr val="9AA5A6"/>
-            </a:solidFill>
-            <a:effectLst/>
-          </c:spPr>
-          <c:invertIfNegative val="0"/>
-          <c:dLbls>
-            <c:numFmt formatCode="0.00;;;" sourceLinked="0"/>
-            <c:txPr>
-              <a:bodyPr/>
-              <a:lstStyle/>
-              <a:p>
-                <a:pPr>
-                  <a:defRPr b="0" i="0" strike="noStrike" sz="1100" u="none">
-                    <a:solidFill>
-                      <a:srgbClr val="FFFFFF"/>
-                    </a:solidFill>
-                    <a:latin typeface="+mn-lt"/>
-                  </a:defRPr>
-                </a:pPr>
-              </a:p>
-            </c:txPr>
-            <c:dLblPos val="inEnd"/>
-            <c:showLegendKey val="0"/>
-            <c:showVal val="1"/>
-            <c:showCatName val="0"/>
-            <c:showSerName val="0"/>
-            <c:showPercent val="0"/>
-            <c:showBubbleSize val="0"/>
-            <c:showLeaderLines val="0"/>
-          </c:dLbls>
-          <c:cat>
-            <c:multiLvlStrRef>
-              <c:f>Sheet1!$A$2:$A$9</c:f>
-              <c:multiLvlStrCache>
-                <c:ptCount val="8"/>
-                <c:lvl>
-                  <c:pt idx="0">
-                    <c:v>Logistic Reg.</c:v>
-                  </c:pt>
-                  <c:pt idx="1">
-                    <c:v>SVM-RBF</c:v>
-                  </c:pt>
-                  <c:pt idx="2">
-                    <c:v>KNN</c:v>
-                  </c:pt>
-                  <c:pt idx="3">
-                    <c:v>Decision Tree</c:v>
-                  </c:pt>
-                  <c:pt idx="4">
-                    <c:v>Random Forest</c:v>
-                  </c:pt>
-                  <c:pt idx="5">
-                    <c:v>XGBoost</c:v>
-                  </c:pt>
-                  <c:pt idx="6">
-                    <c:v>LightGBM</c:v>
-                  </c:pt>
-                  <c:pt idx="7">
-                    <c:v>Stacking</c:v>
-                  </c:pt>
-                </c:lvl>
-              </c:multiLvlStrCache>
-            </c:multiLvlStrRef>
-          </c:cat>
-          <c:val>
-            <c:numRef>
-              <c:f>Sheet1!$B$2:$B$9</c:f>
-              <c:numCache>
-                <c:formatCode>General</c:formatCode>
-                <c:ptCount val="8"/>
-                <c:pt idx="0">
-                  <c:v>0.728</c:v>
-                </c:pt>
-                <c:pt idx="1">
-                  <c:v>0.688</c:v>
-                </c:pt>
-                <c:pt idx="2">
-                  <c:v>0.74</c:v>
-                </c:pt>
-                <c:pt idx="3">
-                  <c:v>0.774</c:v>
-                </c:pt>
-                <c:pt idx="4">
-                  <c:v>0</c:v>
-                </c:pt>
-                <c:pt idx="5">
-                  <c:v>0</c:v>
-                </c:pt>
-                <c:pt idx="6">
-                  <c:v>0</c:v>
-                </c:pt>
-                <c:pt idx="7">
-                  <c:v>0</c:v>
-                </c:pt>
-              </c:numCache>
-            </c:numRef>
-          </c:val>
-        </c:ser>
-        <c:ser>
-          <c:idx val="1"/>
-          <c:order val="1"/>
-          <c:tx>
-            <c:strRef>
-              <c:f>Sheet1!$C$1</c:f>
-              <c:strCache>
-                <c:ptCount val="1"/>
-                <c:pt idx="0">
-                  <c:v>Ensemble</c:v>
-                </c:pt>
-              </c:strCache>
-            </c:strRef>
-          </c:tx>
-          <c:spPr>
-            <a:solidFill>
-              <a:srgbClr val="0F5257"/>
-            </a:solidFill>
-            <a:effectLst/>
-          </c:spPr>
-          <c:invertIfNegative val="0"/>
-          <c:dLbls>
-            <c:numFmt formatCode="0.00;;;" sourceLinked="0"/>
-            <c:txPr>
-              <a:bodyPr/>
-              <a:lstStyle/>
-              <a:p>
-                <a:pPr>
-                  <a:defRPr b="0" i="0" strike="noStrike" sz="1100" u="none">
-                    <a:solidFill>
-                      <a:srgbClr val="FFFFFF"/>
-                    </a:solidFill>
-                    <a:latin typeface="+mn-lt"/>
-                  </a:defRPr>
-                </a:pPr>
-              </a:p>
-            </c:txPr>
-            <c:dLblPos val="inEnd"/>
-            <c:showLegendKey val="0"/>
-            <c:showVal val="1"/>
-            <c:showCatName val="0"/>
-            <c:showSerName val="0"/>
-            <c:showPercent val="0"/>
-            <c:showBubbleSize val="0"/>
-            <c:showLeaderLines val="0"/>
-          </c:dLbls>
-          <c:cat>
-            <c:multiLvlStrRef>
-              <c:f>Sheet1!$A$2:$A$9</c:f>
-              <c:multiLvlStrCache>
-                <c:ptCount val="8"/>
-                <c:lvl>
-                  <c:pt idx="0">
-                    <c:v>Logistic Reg.</c:v>
-                  </c:pt>
-                  <c:pt idx="1">
-                    <c:v>SVM-RBF</c:v>
-                  </c:pt>
-                  <c:pt idx="2">
-                    <c:v>KNN</c:v>
-                  </c:pt>
-                  <c:pt idx="3">
-                    <c:v>Decision Tree</c:v>
-                  </c:pt>
-                  <c:pt idx="4">
-                    <c:v>Random Forest</c:v>
-                  </c:pt>
-                  <c:pt idx="5">
-                    <c:v>XGBoost</c:v>
-                  </c:pt>
-                  <c:pt idx="6">
-                    <c:v>LightGBM</c:v>
-                  </c:pt>
-                  <c:pt idx="7">
-                    <c:v>Stacking</c:v>
-                  </c:pt>
-                </c:lvl>
-              </c:multiLvlStrCache>
-            </c:multiLvlStrRef>
-          </c:cat>
-          <c:val>
-            <c:numRef>
-              <c:f>Sheet1!$C$2:$C$9</c:f>
-              <c:numCache>
-                <c:formatCode>General</c:formatCode>
-                <c:ptCount val="8"/>
-                <c:pt idx="0">
-                  <c:v>0</c:v>
-                </c:pt>
-                <c:pt idx="1">
-                  <c:v>0</c:v>
-                </c:pt>
-                <c:pt idx="2">
-                  <c:v>0</c:v>
-                </c:pt>
-                <c:pt idx="3">
-                  <c:v>0</c:v>
-                </c:pt>
-                <c:pt idx="4">
-                  <c:v>0.776</c:v>
-                </c:pt>
-                <c:pt idx="5">
-                  <c:v>0.911</c:v>
-                </c:pt>
-                <c:pt idx="6">
-                  <c:v>0.849</c:v>
-                </c:pt>
-                <c:pt idx="7">
-                  <c:v>0.79</c:v>
-                </c:pt>
-              </c:numCache>
-            </c:numRef>
-          </c:val>
-        </c:ser>
-        <c:dLbls>
-          <c:numFmt formatCode="0.00;;;" sourceLinked="0"/>
-          <c:txPr>
-            <a:bodyPr/>
-            <a:lstStyle/>
-            <a:p>
-              <a:pPr>
-                <a:defRPr b="0" i="0" strike="noStrike" sz="1100" u="none">
-                  <a:solidFill>
-                    <a:srgbClr val="FFFFFF"/>
-                  </a:solidFill>
-                  <a:latin typeface="+mn-lt"/>
-                </a:defRPr>
-              </a:pPr>
-            </a:p>
-          </c:txPr>
-          <c:dLblPos val="inEnd"/>
-          <c:showLegendKey val="0"/>
-          <c:showVal val="1"/>
-          <c:showCatName val="0"/>
-          <c:showSerName val="0"/>
-          <c:showPercent val="0"/>
-          <c:showBubbleSize val="0"/>
-          <c:showLeaderLines val="0"/>
-        </c:dLbls>
-        <c:gapWidth val="50"/>
-        <c:overlap val="100"/>
-        <c:axId val="2094734554"/>
-        <c:axId val="2094734552"/>
-        <c:axId val="2094734556"/>
-      </c:barChart>
-      <c:catAx>
-        <c:axId val="2094734554"/>
-        <c:scaling>
-          <c:orientation val="minMax"/>
-        </c:scaling>
-        <c:delete val="0"/>
-        <c:axPos val="b"/>
-        <c:numFmt formatCode="General" sourceLinked="1"/>
-        <c:majorTickMark val="out"/>
-        <c:minorTickMark val="none"/>
-        <c:tickLblPos val="low"/>
-        <c:spPr>
-          <a:ln w="12700" cap="flat">
-            <a:solidFill>
-              <a:srgbClr val="888888"/>
-            </a:solidFill>
-            <a:prstDash val="solid"/>
-            <a:round/>
-          </a:ln>
-        </c:spPr>
-        <c:txPr>
-          <a:bodyPr/>
-          <a:lstStyle/>
-          <a:p>
-            <a:pPr>
-              <a:defRPr sz="1200" b="0" i="0" u="none" strike="noStrike">
-                <a:solidFill>
-                  <a:srgbClr val="56676A"/>
-                </a:solidFill>
-                <a:latin typeface="+mn-lt"/>
-              </a:defRPr>
-            </a:pPr>
-            <a:endParaRPr lang="en-US"/>
-          </a:p>
-        </c:txPr>
-        <c:crossAx val="2094734552"/>
-        <c:crosses val="autoZero"/>
-        <c:auto val="1"/>
-        <c:lblAlgn val="ctr"/>
-        <c:noMultiLvlLbl val="1"/>
-      </c:catAx>
-      <c:valAx>
-        <c:axId val="2094734552"/>
-        <c:scaling>
-          <c:orientation val="minMax"/>
-          <c:max val="1"/>
-          <c:min val="0"/>
-        </c:scaling>
-        <c:delete val="0"/>
-        <c:axPos val="l"/>
-        <c:majorGridlines>
-          <c:spPr>
-            <a:ln w="9525" cap="flat">
-              <a:solidFill>
-                <a:srgbClr val="E1E8E6"/>
-              </a:solidFill>
-              <a:prstDash val="solid"/>
-              <a:round/>
-            </a:ln>
-          </c:spPr>
-        </c:majorGridlines>
-        <c:numFmt formatCode="General" sourceLinked="0"/>
-        <c:majorTickMark val="out"/>
-        <c:minorTickMark val="none"/>
-        <c:tickLblPos val="nextTo"/>
-        <c:spPr>
-          <a:ln w="12700" cap="flat">
-            <a:solidFill>
-              <a:srgbClr val="888888"/>
-            </a:solidFill>
-            <a:prstDash val="solid"/>
-            <a:round/>
-          </a:ln>
-        </c:spPr>
-        <c:txPr>
-          <a:bodyPr/>
-          <a:lstStyle/>
-          <a:p>
-            <a:pPr>
-              <a:defRPr sz="1100" b="0" i="0" u="none" strike="noStrike">
-                <a:solidFill>
-                  <a:srgbClr val="56676A"/>
-                </a:solidFill>
-                <a:latin typeface="+mn-lt"/>
-              </a:defRPr>
-            </a:pPr>
-            <a:endParaRPr lang="en-US"/>
-          </a:p>
-        </c:txPr>
-        <c:crossAx val="2094734554"/>
-        <c:crosses val="autoZero"/>
-        <c:crossBetween val="between"/>
-      </c:valAx>
-      <c:spPr>
-        <a:noFill/>
-        <a:ln>
-          <a:noFill/>
-        </a:ln>
-        <a:effectLst/>
-      </c:spPr>
-    </c:plotArea>
-    <c:legend>
-      <c:legendPos val="b"/>
-      <c:overlay val="0"/>
-      <c:txPr>
-        <a:bodyPr/>
-        <a:lstStyle/>
-        <a:p>
-          <a:pPr>
-            <a:defRPr sz="1100">
-              <a:latin typeface="+mn-lt"/>
-              <a:cs typeface="+mn-lt"/>
-            </a:defRPr>
-          </a:pPr>
-          <a:endParaRPr lang="en-US"/>
-        </a:p>
-      </c:txPr>
-    </c:legend>
-    <c:plotVisOnly val="1"/>
-    <c:dispBlanksAs val="span"/>
-  </c:chart>
-  <c:spPr>
-    <a:noFill/>
-    <a:ln>
-      <a:noFill/>
-    </a:ln>
-    <a:effectLst/>
-  </c:spPr>
-  <c:externalData r:id="rId1">
-    <c:autoUpdate val="0"/>
-  </c:externalData>
-</c:chartSpace>
-</file>
-
-<file path=ppt/charts/chart3.xml><?xml version="1.0" encoding="utf-8"?>
-<c:chartSpace xmlns:c="http://schemas.openxmlformats.org/drawingml/2006/chart" xmlns:a="http://schemas.openxmlformats.org/drawingml/2006/main" xmlns:r="http://schemas.openxmlformats.org/officeDocument/2006/relationships">
-  <c:date1904 val="0"/>
-  <c:roundedCorners val="1"/>
-  <c:chart>
-    <c:title>
-      <c:tx>
-        <c:rich>
-          <a:bodyPr/>
-          <a:lstStyle/>
-          <a:p>
-            <a:pPr>
-              <a:defRPr sz="1300" b="0" i="0" u="none" strike="noStrike">
-                <a:solidFill>
-                  <a:srgbClr val="0F3D3E"/>
-                </a:solidFill>
-                <a:latin typeface="+mn-lt"/>
-              </a:defRPr>
-            </a:pPr>
-            <a:r>
-              <a:rPr sz="1300" b="0" i="0" u="none" strike="noStrike">
-                <a:solidFill>
-                  <a:srgbClr val="0F3D3E"/>
-                </a:solidFill>
-                <a:latin typeface="+mn-lt"/>
-              </a:rPr>
-              <a:t>RMSE uji scaffold (lebih kecil lebih baik)</a:t>
-            </a:r>
-          </a:p>
-        </c:rich>
-      </c:tx>
-      <c:layout/>
-      <c:overlay val="0"/>
-    </c:title>
-    <c:autoTitleDeleted val="0"/>
-    <c:plotArea>
-      <c:layout/>
-      <c:barChart>
-        <c:barDir val="bar"/>
-        <c:grouping val="stacked"/>
-        <c:varyColors val="0"/>
-        <c:ser>
-          <c:idx val="0"/>
-          <c:order val="0"/>
-          <c:tx>
-            <c:strRef>
-              <c:f>Sheet1!$B$1</c:f>
-              <c:strCache>
-                <c:ptCount val="1"/>
-                <c:pt idx="0">
-                  <c:v>Model tunggal</c:v>
-                </c:pt>
-              </c:strCache>
-            </c:strRef>
-          </c:tx>
-          <c:spPr>
-            <a:solidFill>
-              <a:srgbClr val="9AA5A6"/>
-            </a:solidFill>
-            <a:effectLst/>
-          </c:spPr>
-          <c:invertIfNegative val="0"/>
-          <c:dLbls>
-            <c:numFmt formatCode="0.000;;;" sourceLinked="0"/>
-            <c:txPr>
-              <a:bodyPr/>
-              <a:lstStyle/>
-              <a:p>
-                <a:pPr>
-                  <a:defRPr b="0" i="0" strike="noStrike" sz="1100" u="none">
-                    <a:solidFill>
-                      <a:srgbClr val="FFFFFF"/>
-                    </a:solidFill>
-                    <a:latin typeface="+mn-lt"/>
-                  </a:defRPr>
-                </a:pPr>
-              </a:p>
-            </c:txPr>
-            <c:dLblPos val="inEnd"/>
-            <c:showLegendKey val="0"/>
-            <c:showVal val="1"/>
-            <c:showCatName val="0"/>
-            <c:showSerName val="0"/>
-            <c:showPercent val="0"/>
-            <c:showBubbleSize val="0"/>
-            <c:showLeaderLines val="0"/>
-          </c:dLbls>
-          <c:cat>
-            <c:multiLvlStrRef>
-              <c:f>Sheet1!$A$2:$A$10</c:f>
-              <c:multiLvlStrCache>
-                <c:ptCount val="9"/>
-                <c:lvl>
-                  <c:pt idx="0">
-                    <c:v>Ridge</c:v>
-                  </c:pt>
-                  <c:pt idx="1">
-                    <c:v>KNN</c:v>
-                  </c:pt>
-                  <c:pt idx="2">
-                    <c:v>SVR-RBF</c:v>
-                  </c:pt>
-                  <c:pt idx="3">
-                    <c:v>Decision Tree</c:v>
-                  </c:pt>
-                  <c:pt idx="4">
-                    <c:v>Random Forest</c:v>
-                  </c:pt>
-                  <c:pt idx="5">
-                    <c:v>XGBoost</c:v>
-                  </c:pt>
-                  <c:pt idx="6">
-                    <c:v>LightGBM</c:v>
-                  </c:pt>
-                  <c:pt idx="7">
-                    <c:v>Stacking</c:v>
-                  </c:pt>
-                  <c:pt idx="8">
-                    <c:v>LightGBM+Optuna</c:v>
-                  </c:pt>
-                </c:lvl>
-              </c:multiLvlStrCache>
-            </c:multiLvlStrRef>
-          </c:cat>
-          <c:val>
-            <c:numRef>
-              <c:f>Sheet1!$B$2:$B$10</c:f>
-              <c:numCache>
-                <c:formatCode>General</c:formatCode>
-                <c:ptCount val="9"/>
-                <c:pt idx="0">
-                  <c:v>1.668</c:v>
-                </c:pt>
-                <c:pt idx="1">
-                  <c:v>1.495</c:v>
-                </c:pt>
-                <c:pt idx="2">
-                  <c:v>1.335</c:v>
-                </c:pt>
-                <c:pt idx="3">
-                  <c:v>1.706</c:v>
-                </c:pt>
-                <c:pt idx="4">
-                  <c:v>0</c:v>
-                </c:pt>
-                <c:pt idx="5">
-                  <c:v>0</c:v>
-                </c:pt>
-                <c:pt idx="6">
-                  <c:v>0</c:v>
-                </c:pt>
-                <c:pt idx="7">
-                  <c:v>0</c:v>
-                </c:pt>
-                <c:pt idx="8">
-                  <c:v>0</c:v>
-                </c:pt>
-              </c:numCache>
-            </c:numRef>
-          </c:val>
-        </c:ser>
-        <c:ser>
-          <c:idx val="1"/>
-          <c:order val="1"/>
-          <c:tx>
-            <c:strRef>
-              <c:f>Sheet1!$C$1</c:f>
-              <c:strCache>
-                <c:ptCount val="1"/>
-                <c:pt idx="0">
-                  <c:v>Ensemble</c:v>
-                </c:pt>
-              </c:strCache>
-            </c:strRef>
-          </c:tx>
-          <c:spPr>
-            <a:solidFill>
-              <a:srgbClr val="0F5257"/>
-            </a:solidFill>
-            <a:effectLst/>
-          </c:spPr>
-          <c:invertIfNegative val="0"/>
-          <c:dLbls>
-            <c:numFmt formatCode="0.000;;;" sourceLinked="0"/>
-            <c:txPr>
-              <a:bodyPr/>
-              <a:lstStyle/>
-              <a:p>
-                <a:pPr>
-                  <a:defRPr b="0" i="0" strike="noStrike" sz="1100" u="none">
-                    <a:solidFill>
-                      <a:srgbClr val="FFFFFF"/>
-                    </a:solidFill>
-                    <a:latin typeface="+mn-lt"/>
-                  </a:defRPr>
-                </a:pPr>
-              </a:p>
-            </c:txPr>
-            <c:dLblPos val="inEnd"/>
-            <c:showLegendKey val="0"/>
-            <c:showVal val="1"/>
-            <c:showCatName val="0"/>
-            <c:showSerName val="0"/>
-            <c:showPercent val="0"/>
-            <c:showBubbleSize val="0"/>
-            <c:showLeaderLines val="0"/>
-          </c:dLbls>
-          <c:cat>
-            <c:multiLvlStrRef>
-              <c:f>Sheet1!$A$2:$A$10</c:f>
-              <c:multiLvlStrCache>
-                <c:ptCount val="9"/>
-                <c:lvl>
-                  <c:pt idx="0">
-                    <c:v>Ridge</c:v>
-                  </c:pt>
-                  <c:pt idx="1">
-                    <c:v>KNN</c:v>
-                  </c:pt>
-                  <c:pt idx="2">
-                    <c:v>SVR-RBF</c:v>
-                  </c:pt>
-                  <c:pt idx="3">
-                    <c:v>Decision Tree</c:v>
-                  </c:pt>
-                  <c:pt idx="4">
-                    <c:v>Random Forest</c:v>
-                  </c:pt>
-                  <c:pt idx="5">
-                    <c:v>XGBoost</c:v>
-                  </c:pt>
-                  <c:pt idx="6">
-                    <c:v>LightGBM</c:v>
-                  </c:pt>
-                  <c:pt idx="7">
-                    <c:v>Stacking</c:v>
-                  </c:pt>
-                  <c:pt idx="8">
-                    <c:v>LightGBM+Optuna</c:v>
-                  </c:pt>
-                </c:lvl>
-              </c:multiLvlStrCache>
-            </c:multiLvlStrRef>
-          </c:cat>
-          <c:val>
-            <c:numRef>
-              <c:f>Sheet1!$C$2:$C$10</c:f>
-              <c:numCache>
-                <c:formatCode>General</c:formatCode>
-                <c:ptCount val="9"/>
-                <c:pt idx="0">
-                  <c:v>0</c:v>
-                </c:pt>
-                <c:pt idx="1">
-                  <c:v>0</c:v>
-                </c:pt>
-                <c:pt idx="2">
-                  <c:v>0</c:v>
-                </c:pt>
-                <c:pt idx="3">
-                  <c:v>0</c:v>
-                </c:pt>
-                <c:pt idx="4">
-                  <c:v>1.306</c:v>
-                </c:pt>
-                <c:pt idx="5">
-                  <c:v>1.281</c:v>
-                </c:pt>
-                <c:pt idx="6">
-                  <c:v>1.254</c:v>
-                </c:pt>
-                <c:pt idx="7">
-                  <c:v>1.222</c:v>
-                </c:pt>
-                <c:pt idx="8">
-                  <c:v>1.259</c:v>
-                </c:pt>
-              </c:numCache>
-            </c:numRef>
-          </c:val>
-        </c:ser>
-        <c:dLbls>
-          <c:numFmt formatCode="0.000;;;" sourceLinked="0"/>
-          <c:txPr>
-            <a:bodyPr/>
-            <a:lstStyle/>
-            <a:p>
-              <a:pPr>
-                <a:defRPr b="0" i="0" strike="noStrike" sz="1100" u="none">
-                  <a:solidFill>
-                    <a:srgbClr val="FFFFFF"/>
-                  </a:solidFill>
-                  <a:latin typeface="+mn-lt"/>
-                </a:defRPr>
-              </a:pPr>
-            </a:p>
-          </c:txPr>
-          <c:dLblPos val="inEnd"/>
-          <c:showLegendKey val="0"/>
-          <c:showVal val="1"/>
-          <c:showCatName val="0"/>
-          <c:showSerName val="0"/>
-          <c:showPercent val="0"/>
-          <c:showBubbleSize val="0"/>
-          <c:showLeaderLines val="0"/>
-        </c:dLbls>
-        <c:gapWidth val="50"/>
-        <c:overlap val="100"/>
-        <c:axId val="2094734554"/>
-        <c:axId val="2094734552"/>
-        <c:axId val="2094734556"/>
-      </c:barChart>
-      <c:catAx>
-        <c:axId val="2094734554"/>
-        <c:scaling>
-          <c:orientation val="maxMin"/>
-        </c:scaling>
-        <c:delete val="0"/>
-        <c:axPos val="l"/>
-        <c:numFmt formatCode="General" sourceLinked="1"/>
-        <c:majorTickMark val="out"/>
-        <c:minorTickMark val="none"/>
-        <c:tickLblPos val="nextTo"/>
-        <c:spPr>
-          <a:ln w="12700" cap="flat">
-            <a:solidFill>
-              <a:srgbClr val="888888"/>
-            </a:solidFill>
-            <a:prstDash val="solid"/>
-            <a:round/>
-          </a:ln>
-        </c:spPr>
-        <c:txPr>
-          <a:bodyPr/>
-          <a:lstStyle/>
-          <a:p>
-            <a:pPr>
-              <a:defRPr sz="1200" b="0" i="0" u="none" strike="noStrike">
-                <a:solidFill>
-                  <a:srgbClr val="56676A"/>
-                </a:solidFill>
-                <a:latin typeface="+mn-lt"/>
-              </a:defRPr>
-            </a:pPr>
-            <a:endParaRPr lang="en-US"/>
-          </a:p>
-        </c:txPr>
-        <c:crossAx val="2094734552"/>
-        <c:crosses val="autoZero"/>
-        <c:auto val="1"/>
-        <c:lblAlgn val="ctr"/>
-        <c:noMultiLvlLbl val="1"/>
-      </c:catAx>
-      <c:valAx>
-        <c:axId val="2094734552"/>
-        <c:scaling>
-          <c:orientation val="minMax"/>
-          <c:max val="1.8"/>
-          <c:min val="0"/>
-        </c:scaling>
-        <c:delete val="0"/>
-        <c:axPos val="b"/>
-        <c:majorGridlines>
-          <c:spPr>
-            <a:ln w="9525" cap="flat">
-              <a:solidFill>
-                <a:srgbClr val="E1E8E6"/>
-              </a:solidFill>
-              <a:prstDash val="solid"/>
-              <a:round/>
-            </a:ln>
-          </c:spPr>
-        </c:majorGridlines>
-        <c:numFmt formatCode="General" sourceLinked="0"/>
-        <c:majorTickMark val="out"/>
-        <c:minorTickMark val="none"/>
-        <c:tickLblPos val="low"/>
-        <c:spPr>
-          <a:ln w="12700" cap="flat">
-            <a:solidFill>
-              <a:srgbClr val="888888"/>
-            </a:solidFill>
-            <a:prstDash val="solid"/>
-            <a:round/>
-          </a:ln>
-        </c:spPr>
-        <c:txPr>
-          <a:bodyPr/>
-          <a:lstStyle/>
-          <a:p>
-            <a:pPr>
-              <a:defRPr sz="1100" b="0" i="0" u="none" strike="noStrike">
-                <a:solidFill>
-                  <a:srgbClr val="56676A"/>
-                </a:solidFill>
-                <a:latin typeface="+mn-lt"/>
-              </a:defRPr>
-            </a:pPr>
-            <a:endParaRPr lang="en-US"/>
-          </a:p>
-        </c:txPr>
-        <c:crossAx val="2094734554"/>
-        <c:crosses val="autoZero"/>
-        <c:crossBetween val="between"/>
-      </c:valAx>
-      <c:spPr>
-        <a:noFill/>
-        <a:ln>
-          <a:noFill/>
-        </a:ln>
-        <a:effectLst/>
-      </c:spPr>
-    </c:plotArea>
-    <c:legend>
-      <c:legendPos val="b"/>
-      <c:overlay val="0"/>
-      <c:txPr>
-        <a:bodyPr/>
-        <a:lstStyle/>
-        <a:p>
-          <a:pPr>
-            <a:defRPr sz="1100">
-              <a:latin typeface="+mn-lt"/>
-              <a:cs typeface="+mn-lt"/>
-            </a:defRPr>
-          </a:pPr>
-          <a:endParaRPr lang="en-US"/>
-        </a:p>
-      </c:txPr>
-    </c:legend>
-    <c:plotVisOnly val="1"/>
-    <c:dispBlanksAs val="span"/>
-  </c:chart>
-  <c:spPr>
-    <a:noFill/>
-    <a:ln>
-      <a:noFill/>
-    </a:ln>
-    <a:effectLst/>
-  </c:spPr>
-  <c:externalData r:id="rId1">
-    <c:autoUpdate val="0"/>
-  </c:externalData>
-</c:chartSpace>
-</file>
-
-<file path=ppt/charts/chart4.xml><?xml version="1.0" encoding="utf-8"?>
-<c:chartSpace xmlns:c="http://schemas.openxmlformats.org/drawingml/2006/chart" xmlns:a="http://schemas.openxmlformats.org/drawingml/2006/main" xmlns:r="http://schemas.openxmlformats.org/officeDocument/2006/relationships">
-  <c:date1904 val="0"/>
-  <c:roundedCorners val="1"/>
-  <c:chart>
-    <c:title>
-      <c:tx>
-        <c:rich>
-          <a:bodyPr/>
-          <a:lstStyle/>
-          <a:p>
-            <a:pPr>
-              <a:defRPr sz="1300" b="0" i="0" u="none" strike="noStrike">
-                <a:solidFill>
-                  <a:srgbClr val="0F3D3E"/>
-                </a:solidFill>
-                <a:latin typeface="+mn-lt"/>
-              </a:defRPr>
-            </a:pPr>
-            <a:r>
-              <a:rPr sz="1300" b="0" i="0" u="none" strike="noStrike">
-                <a:solidFill>
-                  <a:srgbClr val="0F3D3E"/>
-                </a:solidFill>
-                <a:latin typeface="+mn-lt"/>
-              </a:rPr>
-              <a:t>MAE per kategori LogS (data uji scaffold)</a:t>
-            </a:r>
-          </a:p>
-        </c:rich>
-      </c:tx>
-      <c:layout/>
-      <c:overlay val="0"/>
-    </c:title>
-    <c:autoTitleDeleted val="0"/>
-    <c:plotArea>
-      <c:layout/>
-      <c:barChart>
-        <c:barDir val="col"/>
-        <c:grouping val="clustered"/>
-        <c:varyColors val="0"/>
-        <c:ser>
-          <c:idx val="0"/>
-          <c:order val="0"/>
-          <c:tx>
-            <c:strRef>
-              <c:f>Sheet1!$B$1</c:f>
-              <c:strCache>
-                <c:ptCount val="1"/>
-                <c:pt idx="0">
-                  <c:v>tanpa bobot</c:v>
-                </c:pt>
-              </c:strCache>
-            </c:strRef>
-          </c:tx>
-          <c:spPr>
-            <a:solidFill>
-              <a:srgbClr val="9AA5A6"/>
-            </a:solidFill>
-            <a:effectLst/>
-          </c:spPr>
-          <c:invertIfNegative val="0"/>
-          <c:dLbls>
-            <c:numFmt formatCode="0.00" sourceLinked="0"/>
-            <c:txPr>
-              <a:bodyPr/>
-              <a:lstStyle/>
-              <a:p>
-                <a:pPr>
-                  <a:defRPr b="0" i="0" strike="noStrike" sz="1100" u="none">
-                    <a:solidFill>
-                      <a:srgbClr val="16262B"/>
-                    </a:solidFill>
-                    <a:latin typeface="+mn-lt"/>
-                  </a:defRPr>
-                </a:pPr>
-              </a:p>
-            </c:txPr>
-            <c:showLegendKey val="0"/>
-            <c:showVal val="1"/>
-            <c:showCatName val="0"/>
-            <c:showSerName val="0"/>
-            <c:showPercent val="0"/>
-            <c:showBubbleSize val="0"/>
-            <c:showLeaderLines val="0"/>
-          </c:dLbls>
-          <c:cat>
-            <c:multiLvlStrRef>
-              <c:f>Sheet1!$A$2:$A$6</c:f>
-              <c:multiLvlStrCache>
-                <c:ptCount val="5"/>
-                <c:lvl>
-                  <c:pt idx="0">
-                    <c:v>&lt; −6</c:v>
-                  </c:pt>
-                  <c:pt idx="1">
-                    <c:v>−6..−4</c:v>
-                  </c:pt>
-                  <c:pt idx="2">
-                    <c:v>−4..−2</c:v>
-                  </c:pt>
-                  <c:pt idx="3">
-                    <c:v>−2..0</c:v>
-                  </c:pt>
-                  <c:pt idx="4">
-                    <c:v>≥ 0</c:v>
-                  </c:pt>
-                </c:lvl>
-              </c:multiLvlStrCache>
-            </c:multiLvlStrRef>
-          </c:cat>
-          <c:val>
-            <c:numRef>
-              <c:f>Sheet1!$B$2:$B$6</c:f>
-              <c:numCache>
-                <c:formatCode>General</c:formatCode>
-                <c:ptCount val="5"/>
-                <c:pt idx="0">
-                  <c:v>1.484</c:v>
-                </c:pt>
-                <c:pt idx="1">
-                  <c:v>0.962</c:v>
-                </c:pt>
-                <c:pt idx="2">
-                  <c:v>0.69</c:v>
-                </c:pt>
-                <c:pt idx="3">
-                  <c:v>0.607</c:v>
-                </c:pt>
-                <c:pt idx="4">
-                  <c:v>0.979</c:v>
-                </c:pt>
-              </c:numCache>
-            </c:numRef>
-          </c:val>
-        </c:ser>
-        <c:ser>
-          <c:idx val="1"/>
-          <c:order val="1"/>
-          <c:tx>
-            <c:strRef>
-              <c:f>Sheet1!$C$1</c:f>
-              <c:strCache>
-                <c:ptCount val="1"/>
-                <c:pt idx="0">
-                  <c:v>bobot frekuensi-invers</c:v>
-                </c:pt>
-              </c:strCache>
-            </c:strRef>
-          </c:tx>
-          <c:spPr>
-            <a:solidFill>
-              <a:srgbClr val="E3A33B"/>
-            </a:solidFill>
-            <a:effectLst/>
-          </c:spPr>
-          <c:invertIfNegative val="0"/>
-          <c:dLbls>
-            <c:numFmt formatCode="0.00" sourceLinked="0"/>
-            <c:txPr>
-              <a:bodyPr/>
-              <a:lstStyle/>
-              <a:p>
-                <a:pPr>
-                  <a:defRPr b="0" i="0" strike="noStrike" sz="1100" u="none">
-                    <a:solidFill>
-                      <a:srgbClr val="16262B"/>
-                    </a:solidFill>
-                    <a:latin typeface="+mn-lt"/>
-                  </a:defRPr>
-                </a:pPr>
-              </a:p>
-            </c:txPr>
-            <c:showLegendKey val="0"/>
-            <c:showVal val="1"/>
-            <c:showCatName val="0"/>
-            <c:showSerName val="0"/>
-            <c:showPercent val="0"/>
-            <c:showBubbleSize val="0"/>
-            <c:showLeaderLines val="0"/>
-          </c:dLbls>
-          <c:cat>
-            <c:multiLvlStrRef>
-              <c:f>Sheet1!$A$2:$A$6</c:f>
-              <c:multiLvlStrCache>
-                <c:ptCount val="5"/>
-                <c:lvl>
-                  <c:pt idx="0">
-                    <c:v>&lt; −6</c:v>
-                  </c:pt>
-                  <c:pt idx="1">
-                    <c:v>−6..−4</c:v>
-                  </c:pt>
-                  <c:pt idx="2">
-                    <c:v>−4..−2</c:v>
-                  </c:pt>
-                  <c:pt idx="3">
-                    <c:v>−2..0</c:v>
-                  </c:pt>
-                  <c:pt idx="4">
-                    <c:v>≥ 0</c:v>
-                  </c:pt>
-                </c:lvl>
-              </c:multiLvlStrCache>
-            </c:multiLvlStrRef>
-          </c:cat>
-          <c:val>
-            <c:numRef>
-              <c:f>Sheet1!$C$2:$C$6</c:f>
-              <c:numCache>
-                <c:formatCode>General</c:formatCode>
-                <c:ptCount val="5"/>
-                <c:pt idx="0">
-                  <c:v>1.386</c:v>
-                </c:pt>
-                <c:pt idx="1">
-                  <c:v>0.992</c:v>
-                </c:pt>
-                <c:pt idx="2">
-                  <c:v>0.766</c:v>
-                </c:pt>
-                <c:pt idx="3">
-                  <c:v>0.657</c:v>
-                </c:pt>
-                <c:pt idx="4">
-                  <c:v>0.858</c:v>
-                </c:pt>
-              </c:numCache>
-            </c:numRef>
-          </c:val>
-        </c:ser>
-        <c:dLbls>
-          <c:numFmt formatCode="0.00" sourceLinked="0"/>
-          <c:txPr>
-            <a:bodyPr/>
-            <a:lstStyle/>
-            <a:p>
-              <a:pPr>
-                <a:defRPr b="0" i="0" strike="noStrike" sz="1100" u="none">
-                  <a:solidFill>
-                    <a:srgbClr val="16262B"/>
-                  </a:solidFill>
-                  <a:latin typeface="+mn-lt"/>
-                </a:defRPr>
-              </a:pPr>
-            </a:p>
-          </c:txPr>
-          <c:showLegendKey val="0"/>
-          <c:showVal val="1"/>
-          <c:showCatName val="0"/>
-          <c:showSerName val="0"/>
-          <c:showPercent val="0"/>
-          <c:showBubbleSize val="0"/>
-          <c:showLeaderLines val="0"/>
-        </c:dLbls>
-        <c:gapWidth val="150"/>
-        <c:overlap val="0"/>
-        <c:axId val="2094734554"/>
-        <c:axId val="2094734552"/>
-        <c:axId val="2094734556"/>
-      </c:barChart>
-      <c:catAx>
-        <c:axId val="2094734554"/>
-        <c:scaling>
-          <c:orientation val="minMax"/>
-        </c:scaling>
-        <c:delete val="0"/>
-        <c:axPos val="b"/>
-        <c:numFmt formatCode="General" sourceLinked="1"/>
-        <c:majorTickMark val="out"/>
-        <c:minorTickMark val="none"/>
-        <c:tickLblPos val="low"/>
-        <c:spPr>
-          <a:ln w="12700" cap="flat">
-            <a:solidFill>
-              <a:srgbClr val="888888"/>
-            </a:solidFill>
-            <a:prstDash val="solid"/>
-            <a:round/>
-          </a:ln>
-        </c:spPr>
-        <c:txPr>
-          <a:bodyPr/>
-          <a:lstStyle/>
-          <a:p>
-            <a:pPr>
-              <a:defRPr sz="1200" b="0" i="0" u="none" strike="noStrike">
-                <a:solidFill>
-                  <a:srgbClr val="56676A"/>
-                </a:solidFill>
-                <a:latin typeface="+mn-lt"/>
-              </a:defRPr>
-            </a:pPr>
-            <a:endParaRPr lang="en-US"/>
-          </a:p>
-        </c:txPr>
-        <c:crossAx val="2094734552"/>
-        <c:crosses val="autoZero"/>
-        <c:auto val="1"/>
-        <c:lblAlgn val="ctr"/>
-        <c:noMultiLvlLbl val="1"/>
-      </c:catAx>
-      <c:valAx>
-        <c:axId val="2094734552"/>
-        <c:scaling>
-          <c:orientation val="minMax"/>
-          <c:max val="1.7"/>
-          <c:min val="0"/>
-        </c:scaling>
-        <c:delete val="0"/>
-        <c:axPos val="l"/>
-        <c:majorGridlines>
-          <c:spPr>
-            <a:ln w="9525" cap="flat">
-              <a:solidFill>
-                <a:srgbClr val="E1E8E6"/>
-              </a:solidFill>
-              <a:prstDash val="solid"/>
-              <a:round/>
-            </a:ln>
-          </c:spPr>
-        </c:majorGridlines>
-        <c:numFmt formatCode="General" sourceLinked="0"/>
-        <c:majorTickMark val="out"/>
-        <c:minorTickMark val="none"/>
-        <c:tickLblPos val="nextTo"/>
-        <c:spPr>
-          <a:ln w="12700" cap="flat">
-            <a:solidFill>
-              <a:srgbClr val="888888"/>
-            </a:solidFill>
-            <a:prstDash val="solid"/>
-            <a:round/>
-          </a:ln>
-        </c:spPr>
-        <c:txPr>
-          <a:bodyPr/>
-          <a:lstStyle/>
-          <a:p>
-            <a:pPr>
-              <a:defRPr sz="1100" b="0" i="0" u="none" strike="noStrike">
-                <a:solidFill>
-                  <a:srgbClr val="56676A"/>
-                </a:solidFill>
-                <a:latin typeface="+mn-lt"/>
-              </a:defRPr>
-            </a:pPr>
-            <a:endParaRPr lang="en-US"/>
-          </a:p>
-        </c:txPr>
-        <c:crossAx val="2094734554"/>
-        <c:crosses val="autoZero"/>
-        <c:crossBetween val="between"/>
-      </c:valAx>
-      <c:spPr>
-        <a:noFill/>
-        <a:ln>
-          <a:noFill/>
-        </a:ln>
-        <a:effectLst/>
-      </c:spPr>
-    </c:plotArea>
-    <c:legend>
-      <c:legendPos val="b"/>
-      <c:overlay val="0"/>
-      <c:txPr>
-        <a:bodyPr/>
-        <a:lstStyle/>
-        <a:p>
-          <a:pPr>
-            <a:defRPr sz="1100">
-              <a:latin typeface="+mn-lt"/>
-              <a:cs typeface="+mn-lt"/>
-            </a:defRPr>
-          </a:pPr>
-          <a:endParaRPr lang="en-US"/>
-        </a:p>
-      </c:txPr>
-    </c:legend>
-    <c:plotVisOnly val="1"/>
-    <c:dispBlanksAs val="span"/>
-  </c:chart>
-  <c:spPr>
-    <a:noFill/>
-    <a:ln>
-      <a:noFill/>
-    </a:ln>
-    <a:effectLst/>
-  </c:spPr>
-  <c:externalData r:id="rId1">
-    <c:autoUpdate val="0"/>
-  </c:externalData>
-</c:chartSpace>
-</file>
-
-<file path=ppt/charts/chart5.xml><?xml version="1.0" encoding="utf-8"?>
-<c:chartSpace xmlns:c="http://schemas.openxmlformats.org/drawingml/2006/chart" xmlns:a="http://schemas.openxmlformats.org/drawingml/2006/main" xmlns:r="http://schemas.openxmlformats.org/officeDocument/2006/relationships">
-  <c:date1904 val="0"/>
-  <c:roundedCorners val="1"/>
-  <c:chart>
-    <c:title>
-      <c:tx>
-        <c:rich>
-          <a:bodyPr/>
-          <a:lstStyle/>
-          <a:p>
-            <a:pPr>
-              <a:defRPr sz="1300" b="0" i="0" u="none" strike="noStrike">
-                <a:solidFill>
-                  <a:srgbClr val="0F3D3E"/>
-                </a:solidFill>
-                <a:latin typeface="+mn-lt"/>
-              </a:defRPr>
-            </a:pPr>
-            <a:r>
-              <a:rPr sz="1300" b="0" i="0" u="none" strike="noStrike">
-                <a:solidFill>
-                  <a:srgbClr val="0F3D3E"/>
-                </a:solidFill>
-                <a:latin typeface="+mn-lt"/>
-              </a:rPr>
-              <a:t>RMSE uji scaffold vs jumlah label (rata-rata 5 seed)</a:t>
-            </a:r>
-          </a:p>
-        </c:rich>
-      </c:tx>
-      <c:layout/>
-      <c:overlay val="0"/>
-    </c:title>
-    <c:autoTitleDeleted val="0"/>
-    <c:plotArea>
-      <c:layout/>
-      <c:lineChart>
-        <c:varyColors val="0"/>
-        <c:ser>
-          <c:idx val="0"/>
-          <c:order val="0"/>
-          <c:tx>
-            <c:strRef>
-              <c:f>Sheet1!$B$1</c:f>
-              <c:strCache>
-                <c:ptCount val="1"/>
-                <c:pt idx="0">
-                  <c:v>random</c:v>
-                </c:pt>
-              </c:strCache>
-            </c:strRef>
-          </c:tx>
-          <c:spPr>
-            <a:solidFill>
-              <a:srgbClr val="9AA5A6"/>
-            </a:solidFill>
-            <a:ln w="25400" cap="flat">
-              <a:solidFill>
-                <a:srgbClr val="9AA5A6"/>
-              </a:solidFill>
-              <a:prstDash val="solid"/>
-              <a:round/>
-            </a:ln>
-            <a:effectLst/>
-          </c:spPr>
-          <c:invertIfNegative val="0"/>
-          <c:dLbls>
-            <c:numFmt formatCode="#,##0" sourceLinked="0"/>
-            <c:txPr>
-              <a:bodyPr/>
-              <a:lstStyle/>
-              <a:p>
-                <a:pPr>
-                  <a:defRPr b="0" i="0" strike="noStrike" sz="1100" u="none">
-                    <a:solidFill>
-                      <a:srgbClr val="16262B"/>
-                    </a:solidFill>
-                    <a:latin typeface="+mn-lt"/>
-                  </a:defRPr>
-                </a:pPr>
-              </a:p>
-            </c:txPr>
-            <c:showLegendKey val="0"/>
-            <c:showVal val="0"/>
-            <c:showCatName val="0"/>
-            <c:showSerName val="0"/>
-            <c:showPercent val="0"/>
-            <c:showBubbleSize val="0"/>
-            <c:showLeaderLines val="0"/>
-          </c:dLbls>
-          <c:marker>
-            <c:symbol val="circle"/>
-            <c:size val="4"/>
-            <c:spPr>
-              <a:solidFill>
-                <a:srgbClr val="9AA5A6"/>
-              </a:solidFill>
-              <a:ln w="9525" cap="flat">
-                <a:solidFill>
-                  <a:srgbClr val="9AA5A6"/>
-                </a:solidFill>
-                <a:prstDash val="solid"/>
-                <a:round/>
-              </a:ln>
-              <a:effectLst/>
-            </c:spPr>
-          </c:marker>
-          <c:cat>
-            <c:multiLvlStrRef>
-              <c:f>Sheet1!$A$2:$A$22</c:f>
-              <c:multiLvlStrCache>
-                <c:ptCount val="21"/>
-                <c:lvl>
-                  <c:pt idx="0">
-                    <c:v>100</c:v>
-                  </c:pt>
-                  <c:pt idx="1">
-                    <c:v>200</c:v>
-                  </c:pt>
-                  <c:pt idx="2">
-                    <c:v>300</c:v>
-                  </c:pt>
-                  <c:pt idx="3">
-                    <c:v>400</c:v>
-                  </c:pt>
-                  <c:pt idx="4">
-                    <c:v>500</c:v>
-                  </c:pt>
-                  <c:pt idx="5">
-                    <c:v>600</c:v>
-                  </c:pt>
-                  <c:pt idx="6">
-                    <c:v>700</c:v>
-                  </c:pt>
-                  <c:pt idx="7">
-                    <c:v>800</c:v>
-                  </c:pt>
-                  <c:pt idx="8">
-                    <c:v>900</c:v>
-                  </c:pt>
-                  <c:pt idx="9">
-                    <c:v>1.000</c:v>
-                  </c:pt>
-                  <c:pt idx="10">
-                    <c:v>1.100</c:v>
-                  </c:pt>
-                  <c:pt idx="11">
-                    <c:v>1.200</c:v>
-                  </c:pt>
-                  <c:pt idx="12">
-                    <c:v>1.300</c:v>
-                  </c:pt>
-                  <c:pt idx="13">
-                    <c:v>1.400</c:v>
-                  </c:pt>
-                  <c:pt idx="14">
-                    <c:v>1.500</c:v>
-                  </c:pt>
-                  <c:pt idx="15">
-                    <c:v>1.600</c:v>
-                  </c:pt>
-                  <c:pt idx="16">
-                    <c:v>1.700</c:v>
-                  </c:pt>
-                  <c:pt idx="17">
-                    <c:v>1.800</c:v>
-                  </c:pt>
-                  <c:pt idx="18">
-                    <c:v>1.900</c:v>
-                  </c:pt>
-                  <c:pt idx="19">
-                    <c:v>2.000</c:v>
-                  </c:pt>
-                  <c:pt idx="20">
-                    <c:v>2.100</c:v>
-                  </c:pt>
-                </c:lvl>
-              </c:multiLvlStrCache>
-            </c:multiLvlStrRef>
-          </c:cat>
-          <c:val>
-            <c:numRef>
-              <c:f>Sheet1!$B$2:$B$22</c:f>
-              <c:numCache>
-                <c:formatCode>General</c:formatCode>
-                <c:ptCount val="21"/>
-                <c:pt idx="0">
-                  <c:v>1.84</c:v>
-                </c:pt>
-                <c:pt idx="1">
-                  <c:v>1.777</c:v>
-                </c:pt>
-                <c:pt idx="2">
-                  <c:v>1.75</c:v>
-                </c:pt>
-                <c:pt idx="3">
-                  <c:v>1.669</c:v>
-                </c:pt>
-                <c:pt idx="4">
-                  <c:v>1.639</c:v>
-                </c:pt>
-                <c:pt idx="5">
-                  <c:v>1.609</c:v>
-                </c:pt>
-                <c:pt idx="6">
-                  <c:v>1.58</c:v>
-                </c:pt>
-                <c:pt idx="7">
-                  <c:v>1.562</c:v>
-                </c:pt>
-                <c:pt idx="8">
-                  <c:v>1.545</c:v>
-                </c:pt>
-                <c:pt idx="9">
-                  <c:v>1.523</c:v>
-                </c:pt>
-                <c:pt idx="10">
-                  <c:v>1.511</c:v>
-                </c:pt>
-                <c:pt idx="11">
-                  <c:v>1.514</c:v>
-                </c:pt>
-                <c:pt idx="12">
-                  <c:v>1.506</c:v>
-                </c:pt>
-                <c:pt idx="13">
-                  <c:v>1.504</c:v>
-                </c:pt>
-                <c:pt idx="14">
-                  <c:v>1.489</c:v>
-                </c:pt>
-                <c:pt idx="15">
-                  <c:v>1.5</c:v>
-                </c:pt>
-                <c:pt idx="16">
-                  <c:v>1.499</c:v>
-                </c:pt>
-                <c:pt idx="17">
-                  <c:v>1.489</c:v>
-                </c:pt>
-                <c:pt idx="18">
-                  <c:v>1.495</c:v>
-                </c:pt>
-                <c:pt idx="19">
-                  <c:v>1.487</c:v>
-                </c:pt>
-                <c:pt idx="20">
-                  <c:v>1.478</c:v>
-                </c:pt>
-              </c:numCache>
-            </c:numRef>
-          </c:val>
-          <c:smooth val="0"/>
-        </c:ser>
-        <c:ser>
-          <c:idx val="1"/>
-          <c:order val="1"/>
-          <c:tx>
-            <c:strRef>
-              <c:f>Sheet1!$C$1</c:f>
-              <c:strCache>
-                <c:ptCount val="1"/>
-                <c:pt idx="0">
-                  <c:v>uncertainty</c:v>
-                </c:pt>
-              </c:strCache>
-            </c:strRef>
-          </c:tx>
-          <c:spPr>
-            <a:solidFill>
-              <a:srgbClr val="2E6F95"/>
-            </a:solidFill>
-            <a:ln w="25400" cap="flat">
-              <a:solidFill>
-                <a:srgbClr val="2E6F95"/>
-              </a:solidFill>
-              <a:prstDash val="solid"/>
-              <a:round/>
-            </a:ln>
-            <a:effectLst/>
-          </c:spPr>
-          <c:invertIfNegative val="0"/>
-          <c:dLbls>
-            <c:numFmt formatCode="#,##0" sourceLinked="0"/>
-            <c:txPr>
-              <a:bodyPr/>
-              <a:lstStyle/>
-              <a:p>
-                <a:pPr>
-                  <a:defRPr b="0" i="0" strike="noStrike" sz="1100" u="none">
-                    <a:solidFill>
-                      <a:srgbClr val="16262B"/>
-                    </a:solidFill>
-                    <a:latin typeface="+mn-lt"/>
-                  </a:defRPr>
-                </a:pPr>
-              </a:p>
-            </c:txPr>
-            <c:showLegendKey val="0"/>
-            <c:showVal val="0"/>
-            <c:showCatName val="0"/>
-            <c:showSerName val="0"/>
-            <c:showPercent val="0"/>
-            <c:showBubbleSize val="0"/>
-            <c:showLeaderLines val="0"/>
-          </c:dLbls>
-          <c:marker>
-            <c:symbol val="circle"/>
-            <c:size val="4"/>
-            <c:spPr>
-              <a:solidFill>
-                <a:srgbClr val="2E6F95"/>
-              </a:solidFill>
-              <a:ln w="9525" cap="flat">
-                <a:solidFill>
-                  <a:srgbClr val="2E6F95"/>
-                </a:solidFill>
-                <a:prstDash val="solid"/>
-                <a:round/>
-              </a:ln>
-              <a:effectLst/>
-            </c:spPr>
-          </c:marker>
-          <c:cat>
-            <c:multiLvlStrRef>
-              <c:f>Sheet1!$A$2:$A$22</c:f>
-              <c:multiLvlStrCache>
-                <c:ptCount val="21"/>
-                <c:lvl>
-                  <c:pt idx="0">
-                    <c:v>100</c:v>
-                  </c:pt>
-                  <c:pt idx="1">
-                    <c:v>200</c:v>
-                  </c:pt>
-                  <c:pt idx="2">
-                    <c:v>300</c:v>
-                  </c:pt>
-                  <c:pt idx="3">
-                    <c:v>400</c:v>
-                  </c:pt>
-                  <c:pt idx="4">
-                    <c:v>500</c:v>
-                  </c:pt>
-                  <c:pt idx="5">
-                    <c:v>600</c:v>
-                  </c:pt>
-                  <c:pt idx="6">
-                    <c:v>700</c:v>
-                  </c:pt>
-                  <c:pt idx="7">
-                    <c:v>800</c:v>
-                  </c:pt>
-                  <c:pt idx="8">
-                    <c:v>900</c:v>
-                  </c:pt>
-                  <c:pt idx="9">
-                    <c:v>1.000</c:v>
-                  </c:pt>
-                  <c:pt idx="10">
-                    <c:v>1.100</c:v>
-                  </c:pt>
-                  <c:pt idx="11">
-                    <c:v>1.200</c:v>
-                  </c:pt>
-                  <c:pt idx="12">
-                    <c:v>1.300</c:v>
-                  </c:pt>
-                  <c:pt idx="13">
-                    <c:v>1.400</c:v>
-                  </c:pt>
-                  <c:pt idx="14">
-                    <c:v>1.500</c:v>
-                  </c:pt>
-                  <c:pt idx="15">
-                    <c:v>1.600</c:v>
-                  </c:pt>
-                  <c:pt idx="16">
-                    <c:v>1.700</c:v>
-                  </c:pt>
-                  <c:pt idx="17">
-                    <c:v>1.800</c:v>
-                  </c:pt>
-                  <c:pt idx="18">
-                    <c:v>1.900</c:v>
-                  </c:pt>
-                  <c:pt idx="19">
-                    <c:v>2.000</c:v>
-                  </c:pt>
-                  <c:pt idx="20">
-                    <c:v>2.100</c:v>
-                  </c:pt>
-                </c:lvl>
-              </c:multiLvlStrCache>
-            </c:multiLvlStrRef>
-          </c:cat>
-          <c:val>
-            <c:numRef>
-              <c:f>Sheet1!$C$2:$C$22</c:f>
-              <c:numCache>
-                <c:formatCode>General</c:formatCode>
-                <c:ptCount val="21"/>
-                <c:pt idx="0">
-                  <c:v>1.84</c:v>
-                </c:pt>
-                <c:pt idx="1">
-                  <c:v>1.723</c:v>
-                </c:pt>
-                <c:pt idx="2">
-                  <c:v>1.674</c:v>
-                </c:pt>
-                <c:pt idx="3">
-                  <c:v>1.659</c:v>
-                </c:pt>
-                <c:pt idx="4">
-                  <c:v>1.621</c:v>
-                </c:pt>
-                <c:pt idx="5">
-                  <c:v>1.589</c:v>
-                </c:pt>
-                <c:pt idx="6">
-                  <c:v>1.577</c:v>
-                </c:pt>
-                <c:pt idx="7">
-                  <c:v>1.547</c:v>
-                </c:pt>
-                <c:pt idx="8">
-                  <c:v>1.508</c:v>
-                </c:pt>
-                <c:pt idx="9">
-                  <c:v>1.492</c:v>
-                </c:pt>
-                <c:pt idx="10">
-                  <c:v>1.483</c:v>
-                </c:pt>
-                <c:pt idx="11">
-                  <c:v>1.477</c:v>
-                </c:pt>
-                <c:pt idx="12">
-                  <c:v>1.465</c:v>
-                </c:pt>
-                <c:pt idx="13">
-                  <c:v>1.462</c:v>
-                </c:pt>
-                <c:pt idx="14">
-                  <c:v>1.45</c:v>
-                </c:pt>
-                <c:pt idx="15">
-                  <c:v>1.448</c:v>
-                </c:pt>
-                <c:pt idx="16">
-                  <c:v>1.439</c:v>
-                </c:pt>
-                <c:pt idx="17">
-                  <c:v>1.43</c:v>
-                </c:pt>
-                <c:pt idx="18">
-                  <c:v>1.43</c:v>
-                </c:pt>
-                <c:pt idx="19">
-                  <c:v>1.423</c:v>
-                </c:pt>
-                <c:pt idx="20">
-                  <c:v>1.412</c:v>
-                </c:pt>
-              </c:numCache>
-            </c:numRef>
-          </c:val>
-          <c:smooth val="0"/>
-        </c:ser>
-        <c:ser>
-          <c:idx val="2"/>
-          <c:order val="2"/>
-          <c:tx>
-            <c:strRef>
-              <c:f>Sheet1!$D$1</c:f>
-              <c:strCache>
-                <c:ptCount val="1"/>
-                <c:pt idx="0">
-                  <c:v>diversity</c:v>
-                </c:pt>
-              </c:strCache>
-            </c:strRef>
-          </c:tx>
-          <c:spPr>
-            <a:solidFill>
-              <a:srgbClr val="6C8F7D"/>
-            </a:solidFill>
-            <a:ln w="25400" cap="flat">
-              <a:solidFill>
-                <a:srgbClr val="6C8F7D"/>
-              </a:solidFill>
-              <a:prstDash val="solid"/>
-              <a:round/>
-            </a:ln>
-            <a:effectLst/>
-          </c:spPr>
-          <c:invertIfNegative val="0"/>
-          <c:dLbls>
-            <c:numFmt formatCode="#,##0" sourceLinked="0"/>
-            <c:txPr>
-              <a:bodyPr/>
-              <a:lstStyle/>
-              <a:p>
-                <a:pPr>
-                  <a:defRPr b="0" i="0" strike="noStrike" sz="1100" u="none">
-                    <a:solidFill>
-                      <a:srgbClr val="16262B"/>
-                    </a:solidFill>
-                    <a:latin typeface="+mn-lt"/>
-                  </a:defRPr>
-                </a:pPr>
-              </a:p>
-            </c:txPr>
-            <c:showLegendKey val="0"/>
-            <c:showVal val="0"/>
-            <c:showCatName val="0"/>
-            <c:showSerName val="0"/>
-            <c:showPercent val="0"/>
-            <c:showBubbleSize val="0"/>
-            <c:showLeaderLines val="0"/>
-          </c:dLbls>
-          <c:marker>
-            <c:symbol val="circle"/>
-            <c:size val="4"/>
-            <c:spPr>
-              <a:solidFill>
-                <a:srgbClr val="6C8F7D"/>
-              </a:solidFill>
-              <a:ln w="9525" cap="flat">
-                <a:solidFill>
-                  <a:srgbClr val="6C8F7D"/>
-                </a:solidFill>
-                <a:prstDash val="solid"/>
-                <a:round/>
-              </a:ln>
-              <a:effectLst/>
-            </c:spPr>
-          </c:marker>
-          <c:cat>
-            <c:multiLvlStrRef>
-              <c:f>Sheet1!$A$2:$A$22</c:f>
-              <c:multiLvlStrCache>
-                <c:ptCount val="21"/>
-                <c:lvl>
-                  <c:pt idx="0">
-                    <c:v>100</c:v>
-                  </c:pt>
-                  <c:pt idx="1">
-                    <c:v>200</c:v>
-                  </c:pt>
-                  <c:pt idx="2">
-                    <c:v>300</c:v>
-                  </c:pt>
-                  <c:pt idx="3">
-                    <c:v>400</c:v>
-                  </c:pt>
-                  <c:pt idx="4">
-                    <c:v>500</c:v>
-                  </c:pt>
-                  <c:pt idx="5">
-                    <c:v>600</c:v>
-                  </c:pt>
-                  <c:pt idx="6">
-                    <c:v>700</c:v>
-                  </c:pt>
-                  <c:pt idx="7">
-                    <c:v>800</c:v>
-                  </c:pt>
-                  <c:pt idx="8">
-                    <c:v>900</c:v>
-                  </c:pt>
-                  <c:pt idx="9">
-                    <c:v>1.000</c:v>
-                  </c:pt>
-                  <c:pt idx="10">
-                    <c:v>1.100</c:v>
-                  </c:pt>
-                  <c:pt idx="11">
-                    <c:v>1.200</c:v>
-                  </c:pt>
-                  <c:pt idx="12">
-                    <c:v>1.300</c:v>
-                  </c:pt>
-                  <c:pt idx="13">
-                    <c:v>1.400</c:v>
-                  </c:pt>
-                  <c:pt idx="14">
-                    <c:v>1.500</c:v>
-                  </c:pt>
-                  <c:pt idx="15">
-                    <c:v>1.600</c:v>
-                  </c:pt>
-                  <c:pt idx="16">
-                    <c:v>1.700</c:v>
-                  </c:pt>
-                  <c:pt idx="17">
-                    <c:v>1.800</c:v>
-                  </c:pt>
-                  <c:pt idx="18">
-                    <c:v>1.900</c:v>
-                  </c:pt>
-                  <c:pt idx="19">
-                    <c:v>2.000</c:v>
-                  </c:pt>
-                  <c:pt idx="20">
-                    <c:v>2.100</c:v>
-                  </c:pt>
-                </c:lvl>
-              </c:multiLvlStrCache>
-            </c:multiLvlStrRef>
-          </c:cat>
-          <c:val>
-            <c:numRef>
-              <c:f>Sheet1!$D$2:$D$22</c:f>
-              <c:numCache>
-                <c:formatCode>General</c:formatCode>
-                <c:ptCount val="21"/>
-                <c:pt idx="0">
-                  <c:v>1.84</c:v>
-                </c:pt>
-                <c:pt idx="1">
-                  <c:v>1.667</c:v>
-                </c:pt>
-                <c:pt idx="2">
-                  <c:v>1.613</c:v>
-                </c:pt>
-                <c:pt idx="3">
-                  <c:v>1.58</c:v>
-                </c:pt>
-                <c:pt idx="4">
-                  <c:v>1.552</c:v>
-                </c:pt>
-                <c:pt idx="5">
-                  <c:v>1.534</c:v>
-                </c:pt>
-                <c:pt idx="6">
-                  <c:v>1.513</c:v>
-                </c:pt>
-                <c:pt idx="7">
-                  <c:v>1.51</c:v>
-                </c:pt>
-                <c:pt idx="8">
-                  <c:v>1.506</c:v>
-                </c:pt>
-                <c:pt idx="9">
-                  <c:v>1.5</c:v>
-                </c:pt>
-                <c:pt idx="10">
-                  <c:v>1.504</c:v>
-                </c:pt>
-                <c:pt idx="11">
-                  <c:v>1.5</c:v>
-                </c:pt>
-                <c:pt idx="12">
-                  <c:v>1.5</c:v>
-                </c:pt>
-                <c:pt idx="13">
-                  <c:v>1.477</c:v>
-                </c:pt>
-                <c:pt idx="14">
-                  <c:v>1.464</c:v>
-                </c:pt>
-                <c:pt idx="15">
-                  <c:v>1.456</c:v>
-                </c:pt>
-                <c:pt idx="16">
-                  <c:v>1.453</c:v>
-                </c:pt>
-                <c:pt idx="17">
-                  <c:v>1.455</c:v>
-                </c:pt>
-                <c:pt idx="18">
-                  <c:v>1.454</c:v>
-                </c:pt>
-                <c:pt idx="19">
-                  <c:v>1.455</c:v>
-                </c:pt>
-                <c:pt idx="20">
-                  <c:v>1.44</c:v>
-                </c:pt>
-              </c:numCache>
-            </c:numRef>
-          </c:val>
-          <c:smooth val="0"/>
-        </c:ser>
-        <c:ser>
-          <c:idx val="3"/>
-          <c:order val="3"/>
-          <c:tx>
-            <c:strRef>
-              <c:f>Sheet1!$E$1</c:f>
-              <c:strCache>
-                <c:ptCount val="1"/>
-                <c:pt idx="0">
-                  <c:v>bandit ε-greedy</c:v>
-                </c:pt>
-              </c:strCache>
-            </c:strRef>
-          </c:tx>
-          <c:spPr>
-            <a:solidFill>
-              <a:srgbClr val="E3A33B"/>
-            </a:solidFill>
-            <a:ln w="25400" cap="flat">
-              <a:solidFill>
-                <a:srgbClr val="E3A33B"/>
-              </a:solidFill>
-              <a:prstDash val="solid"/>
-              <a:round/>
-            </a:ln>
-            <a:effectLst/>
-          </c:spPr>
-          <c:invertIfNegative val="0"/>
-          <c:dLbls>
-            <c:numFmt formatCode="#,##0" sourceLinked="0"/>
-            <c:txPr>
-              <a:bodyPr/>
-              <a:lstStyle/>
-              <a:p>
-                <a:pPr>
-                  <a:defRPr b="0" i="0" strike="noStrike" sz="1100" u="none">
-                    <a:solidFill>
-                      <a:srgbClr val="16262B"/>
-                    </a:solidFill>
-                    <a:latin typeface="+mn-lt"/>
-                  </a:defRPr>
-                </a:pPr>
-              </a:p>
-            </c:txPr>
-            <c:showLegendKey val="0"/>
-            <c:showVal val="0"/>
-            <c:showCatName val="0"/>
-            <c:showSerName val="0"/>
-            <c:showPercent val="0"/>
-            <c:showBubbleSize val="0"/>
-            <c:showLeaderLines val="0"/>
-          </c:dLbls>
-          <c:marker>
-            <c:symbol val="circle"/>
-            <c:size val="4"/>
-            <c:spPr>
-              <a:solidFill>
-                <a:srgbClr val="E3A33B"/>
-              </a:solidFill>
-              <a:ln w="9525" cap="flat">
-                <a:solidFill>
-                  <a:srgbClr val="E3A33B"/>
-                </a:solidFill>
-                <a:prstDash val="solid"/>
-                <a:round/>
-              </a:ln>
-              <a:effectLst/>
-            </c:spPr>
-          </c:marker>
-          <c:cat>
-            <c:multiLvlStrRef>
-              <c:f>Sheet1!$A$2:$A$22</c:f>
-              <c:multiLvlStrCache>
-                <c:ptCount val="21"/>
-                <c:lvl>
-                  <c:pt idx="0">
-                    <c:v>100</c:v>
-                  </c:pt>
-                  <c:pt idx="1">
-                    <c:v>200</c:v>
-                  </c:pt>
-                  <c:pt idx="2">
-                    <c:v>300</c:v>
-                  </c:pt>
-                  <c:pt idx="3">
-                    <c:v>400</c:v>
-                  </c:pt>
-                  <c:pt idx="4">
-                    <c:v>500</c:v>
-                  </c:pt>
-                  <c:pt idx="5">
-                    <c:v>600</c:v>
-                  </c:pt>
-                  <c:pt idx="6">
-                    <c:v>700</c:v>
-                  </c:pt>
-                  <c:pt idx="7">
-                    <c:v>800</c:v>
-                  </c:pt>
-                  <c:pt idx="8">
-                    <c:v>900</c:v>
-                  </c:pt>
-                  <c:pt idx="9">
-                    <c:v>1.000</c:v>
-                  </c:pt>
-                  <c:pt idx="10">
-                    <c:v>1.100</c:v>
-                  </c:pt>
-                  <c:pt idx="11">
-                    <c:v>1.200</c:v>
-                  </c:pt>
-                  <c:pt idx="12">
-                    <c:v>1.300</c:v>
-                  </c:pt>
-                  <c:pt idx="13">
-                    <c:v>1.400</c:v>
-                  </c:pt>
-                  <c:pt idx="14">
-                    <c:v>1.500</c:v>
-                  </c:pt>
-                  <c:pt idx="15">
-                    <c:v>1.600</c:v>
-                  </c:pt>
-                  <c:pt idx="16">
-                    <c:v>1.700</c:v>
-                  </c:pt>
-                  <c:pt idx="17">
-                    <c:v>1.800</c:v>
-                  </c:pt>
-                  <c:pt idx="18">
-                    <c:v>1.900</c:v>
-                  </c:pt>
-                  <c:pt idx="19">
-                    <c:v>2.000</c:v>
-                  </c:pt>
-                  <c:pt idx="20">
-                    <c:v>2.100</c:v>
-                  </c:pt>
-                </c:lvl>
-              </c:multiLvlStrCache>
-            </c:multiLvlStrRef>
-          </c:cat>
-          <c:val>
-            <c:numRef>
-              <c:f>Sheet1!$E$2:$E$22</c:f>
-              <c:numCache>
-                <c:formatCode>General</c:formatCode>
-                <c:ptCount val="21"/>
-                <c:pt idx="0">
-                  <c:v>1.84</c:v>
-                </c:pt>
-                <c:pt idx="1">
-                  <c:v>1.777</c:v>
-                </c:pt>
-                <c:pt idx="2">
-                  <c:v>1.681</c:v>
-                </c:pt>
-                <c:pt idx="3">
-                  <c:v>1.586</c:v>
-                </c:pt>
-                <c:pt idx="4">
-                  <c:v>1.581</c:v>
-                </c:pt>
-                <c:pt idx="5">
-                  <c:v>1.536</c:v>
-                </c:pt>
-                <c:pt idx="6">
-                  <c:v>1.515</c:v>
-                </c:pt>
-                <c:pt idx="7">
-                  <c:v>1.505</c:v>
-                </c:pt>
-                <c:pt idx="8">
-                  <c:v>1.487</c:v>
-                </c:pt>
-                <c:pt idx="9">
-                  <c:v>1.481</c:v>
-                </c:pt>
-                <c:pt idx="10">
-                  <c:v>1.464</c:v>
-                </c:pt>
-                <c:pt idx="11">
-                  <c:v>1.451</c:v>
-                </c:pt>
-                <c:pt idx="12">
-                  <c:v>1.441</c:v>
-                </c:pt>
-                <c:pt idx="13">
-                  <c:v>1.438</c:v>
-                </c:pt>
-                <c:pt idx="14">
-                  <c:v>1.444</c:v>
-                </c:pt>
-                <c:pt idx="15">
-                  <c:v>1.439</c:v>
-                </c:pt>
-                <c:pt idx="16">
-                  <c:v>1.431</c:v>
-                </c:pt>
-                <c:pt idx="17">
-                  <c:v>1.428</c:v>
-                </c:pt>
-                <c:pt idx="18">
-                  <c:v>1.418</c:v>
-                </c:pt>
-                <c:pt idx="19">
-                  <c:v>1.414</c:v>
-                </c:pt>
-                <c:pt idx="20">
-                  <c:v>1.41</c:v>
-                </c:pt>
-              </c:numCache>
-            </c:numRef>
-          </c:val>
-          <c:smooth val="0"/>
-        </c:ser>
-        <c:ser>
-          <c:idx val="4"/>
-          <c:order val="4"/>
-          <c:tx>
-            <c:strRef>
-              <c:f>Sheet1!$F$1</c:f>
-              <c:strCache>
-                <c:ptCount val="1"/>
-                <c:pt idx="0">
-                  <c:v>bandit UCB1</c:v>
-                </c:pt>
-              </c:strCache>
-            </c:strRef>
-          </c:tx>
-          <c:spPr>
-            <a:solidFill>
-              <a:srgbClr val="C4553B"/>
-            </a:solidFill>
-            <a:ln w="25400" cap="flat">
-              <a:solidFill>
-                <a:srgbClr val="C4553B"/>
-              </a:solidFill>
-              <a:prstDash val="solid"/>
-              <a:round/>
-            </a:ln>
-            <a:effectLst/>
-          </c:spPr>
-          <c:invertIfNegative val="0"/>
-          <c:dLbls>
-            <c:numFmt formatCode="#,##0" sourceLinked="0"/>
-            <c:txPr>
-              <a:bodyPr/>
-              <a:lstStyle/>
-              <a:p>
-                <a:pPr>
-                  <a:defRPr b="0" i="0" strike="noStrike" sz="1100" u="none">
-                    <a:solidFill>
-                      <a:srgbClr val="16262B"/>
-                    </a:solidFill>
-                    <a:latin typeface="+mn-lt"/>
-                  </a:defRPr>
-                </a:pPr>
-              </a:p>
-            </c:txPr>
-            <c:showLegendKey val="0"/>
-            <c:showVal val="0"/>
-            <c:showCatName val="0"/>
-            <c:showSerName val="0"/>
-            <c:showPercent val="0"/>
-            <c:showBubbleSize val="0"/>
-            <c:showLeaderLines val="0"/>
-          </c:dLbls>
-          <c:marker>
-            <c:symbol val="circle"/>
-            <c:size val="4"/>
-            <c:spPr>
-              <a:solidFill>
-                <a:srgbClr val="C4553B"/>
-              </a:solidFill>
-              <a:ln w="9525" cap="flat">
-                <a:solidFill>
-                  <a:srgbClr val="C4553B"/>
-                </a:solidFill>
-                <a:prstDash val="solid"/>
-                <a:round/>
-              </a:ln>
-              <a:effectLst/>
-            </c:spPr>
-          </c:marker>
-          <c:cat>
-            <c:multiLvlStrRef>
-              <c:f>Sheet1!$A$2:$A$22</c:f>
-              <c:multiLvlStrCache>
-                <c:ptCount val="21"/>
-                <c:lvl>
-                  <c:pt idx="0">
-                    <c:v>100</c:v>
-                  </c:pt>
-                  <c:pt idx="1">
-                    <c:v>200</c:v>
-                  </c:pt>
-                  <c:pt idx="2">
-                    <c:v>300</c:v>
-                  </c:pt>
-                  <c:pt idx="3">
-                    <c:v>400</c:v>
-                  </c:pt>
-                  <c:pt idx="4">
-                    <c:v>500</c:v>
-                  </c:pt>
-                  <c:pt idx="5">
-                    <c:v>600</c:v>
-                  </c:pt>
-                  <c:pt idx="6">
-                    <c:v>700</c:v>
-                  </c:pt>
-                  <c:pt idx="7">
-                    <c:v>800</c:v>
-                  </c:pt>
-                  <c:pt idx="8">
-                    <c:v>900</c:v>
-                  </c:pt>
-                  <c:pt idx="9">
-                    <c:v>1.000</c:v>
-                  </c:pt>
-                  <c:pt idx="10">
-                    <c:v>1.100</c:v>
-                  </c:pt>
-                  <c:pt idx="11">
-                    <c:v>1.200</c:v>
-                  </c:pt>
-                  <c:pt idx="12">
-                    <c:v>1.300</c:v>
-                  </c:pt>
-                  <c:pt idx="13">
-                    <c:v>1.400</c:v>
-                  </c:pt>
-                  <c:pt idx="14">
-                    <c:v>1.500</c:v>
-                  </c:pt>
-                  <c:pt idx="15">
-                    <c:v>1.600</c:v>
-                  </c:pt>
-                  <c:pt idx="16">
-                    <c:v>1.700</c:v>
-                  </c:pt>
-                  <c:pt idx="17">
-                    <c:v>1.800</c:v>
-                  </c:pt>
-                  <c:pt idx="18">
-                    <c:v>1.900</c:v>
-                  </c:pt>
-                  <c:pt idx="19">
-                    <c:v>2.000</c:v>
-                  </c:pt>
-                  <c:pt idx="20">
-                    <c:v>2.100</c:v>
-                  </c:pt>
-                </c:lvl>
-              </c:multiLvlStrCache>
-            </c:multiLvlStrRef>
-          </c:cat>
-          <c:val>
-            <c:numRef>
-              <c:f>Sheet1!$F$2:$F$22</c:f>
-              <c:numCache>
-                <c:formatCode>General</c:formatCode>
-                <c:ptCount val="21"/>
-                <c:pt idx="0">
-                  <c:v>1.84</c:v>
-                </c:pt>
-                <c:pt idx="1">
-                  <c:v>1.777</c:v>
-                </c:pt>
-                <c:pt idx="2">
-                  <c:v>1.681</c:v>
-                </c:pt>
-                <c:pt idx="3">
-                  <c:v>1.586</c:v>
-                </c:pt>
-                <c:pt idx="4">
-                  <c:v>1.581</c:v>
-                </c:pt>
-                <c:pt idx="5">
-                  <c:v>1.536</c:v>
-                </c:pt>
-                <c:pt idx="6">
-                  <c:v>1.506</c:v>
-                </c:pt>
-                <c:pt idx="7">
-                  <c:v>1.506</c:v>
-                </c:pt>
-                <c:pt idx="8">
-                  <c:v>1.481</c:v>
-                </c:pt>
-                <c:pt idx="9">
-                  <c:v>1.471</c:v>
-                </c:pt>
-                <c:pt idx="10">
-                  <c:v>1.471</c:v>
-                </c:pt>
-                <c:pt idx="11">
-                  <c:v>1.457</c:v>
-                </c:pt>
-                <c:pt idx="12">
-                  <c:v>1.45</c:v>
-                </c:pt>
-                <c:pt idx="13">
-                  <c:v>1.446</c:v>
-                </c:pt>
-                <c:pt idx="14">
-                  <c:v>1.436</c:v>
-                </c:pt>
-                <c:pt idx="15">
-                  <c:v>1.438</c:v>
-                </c:pt>
-                <c:pt idx="16">
-                  <c:v>1.431</c:v>
-                </c:pt>
-                <c:pt idx="17">
-                  <c:v>1.425</c:v>
-                </c:pt>
-                <c:pt idx="18">
-                  <c:v>1.417</c:v>
-                </c:pt>
-                <c:pt idx="19">
-                  <c:v>1.414</c:v>
-                </c:pt>
-                <c:pt idx="20">
-                  <c:v>1.41</c:v>
-                </c:pt>
-              </c:numCache>
-            </c:numRef>
-          </c:val>
-          <c:smooth val="0"/>
-        </c:ser>
-        <c:dLbls>
-          <c:numFmt formatCode="#,##0" sourceLinked="0"/>
-          <c:txPr>
-            <a:bodyPr/>
-            <a:lstStyle/>
-            <a:p>
-              <a:pPr>
-                <a:defRPr b="0" i="0" strike="noStrike" sz="1100" u="none">
-                  <a:solidFill>
-                    <a:srgbClr val="16262B"/>
-                  </a:solidFill>
-                  <a:latin typeface="+mn-lt"/>
-                </a:defRPr>
-              </a:pPr>
-            </a:p>
-          </c:txPr>
-          <c:showLegendKey val="0"/>
-          <c:showVal val="0"/>
-          <c:showCatName val="0"/>
-          <c:showSerName val="0"/>
-          <c:showPercent val="0"/>
-          <c:showBubbleSize val="0"/>
-          <c:showLeaderLines val="0"/>
-        </c:dLbls>
-        <c:marker val="1"/>
-        <c:axId val="2094734554"/>
-        <c:axId val="2094734552"/>
-        <c:axId val="2094734556"/>
-      </c:lineChart>
-      <c:catAx>
-        <c:axId val="2094734554"/>
-        <c:scaling>
-          <c:orientation val="minMax"/>
-        </c:scaling>
-        <c:delete val="0"/>
-        <c:axPos val="b"/>
-        <c:numFmt formatCode="General" sourceLinked="1"/>
-        <c:majorTickMark val="out"/>
-        <c:minorTickMark val="none"/>
-        <c:tickLblPos val="low"/>
-        <c:spPr>
-          <a:ln w="12700" cap="flat">
-            <a:solidFill>
-              <a:srgbClr val="888888"/>
-            </a:solidFill>
-            <a:prstDash val="solid"/>
-            <a:round/>
-          </a:ln>
-        </c:spPr>
-        <c:txPr>
-          <a:bodyPr/>
-          <a:lstStyle/>
-          <a:p>
-            <a:pPr>
-              <a:defRPr sz="1000" b="0" i="0" u="none" strike="noStrike">
-                <a:solidFill>
-                  <a:srgbClr val="56676A"/>
-                </a:solidFill>
-                <a:latin typeface="+mn-lt"/>
-              </a:defRPr>
-            </a:pPr>
-            <a:endParaRPr lang="en-US"/>
-          </a:p>
-        </c:txPr>
-        <c:crossAx val="2094734552"/>
-        <c:crosses val="autoZero"/>
-        <c:auto val="1"/>
-        <c:lblAlgn val="ctr"/>
-        <c:noMultiLvlLbl val="1"/>
-      </c:catAx>
-      <c:valAx>
-        <c:axId val="2094734552"/>
-        <c:scaling>
-          <c:orientation val="minMax"/>
-          <c:max val="1.9"/>
-          <c:min val="1.3"/>
-        </c:scaling>
-        <c:delete val="0"/>
-        <c:axPos val="l"/>
-        <c:majorGridlines>
-          <c:spPr>
-            <a:ln w="9525" cap="flat">
-              <a:solidFill>
-                <a:srgbClr val="E1E8E6"/>
-              </a:solidFill>
-              <a:prstDash val="solid"/>
-              <a:round/>
-            </a:ln>
-          </c:spPr>
-        </c:majorGridlines>
-        <c:numFmt formatCode="0.0" sourceLinked="0"/>
-        <c:majorTickMark val="out"/>
-        <c:minorTickMark val="none"/>
-        <c:tickLblPos val="nextTo"/>
-        <c:spPr>
-          <a:ln w="12700" cap="flat">
-            <a:solidFill>
-              <a:srgbClr val="888888"/>
-            </a:solidFill>
-            <a:prstDash val="solid"/>
-            <a:round/>
-          </a:ln>
-        </c:spPr>
-        <c:txPr>
-          <a:bodyPr/>
-          <a:lstStyle/>
-          <a:p>
-            <a:pPr>
-              <a:defRPr sz="1100" b="0" i="0" u="none" strike="noStrike">
-                <a:solidFill>
-                  <a:srgbClr val="56676A"/>
-                </a:solidFill>
-                <a:latin typeface="+mn-lt"/>
-              </a:defRPr>
-            </a:pPr>
-            <a:endParaRPr lang="en-US"/>
-          </a:p>
-        </c:txPr>
-        <c:crossAx val="2094734554"/>
-        <c:crosses val="autoZero"/>
-        <c:crossBetween val="between"/>
-      </c:valAx>
-      <c:spPr>
-        <a:noFill/>
-        <a:ln>
-          <a:noFill/>
-        </a:ln>
-        <a:effectLst/>
-      </c:spPr>
-    </c:plotArea>
-    <c:legend>
-      <c:legendPos val="b"/>
-      <c:overlay val="0"/>
-      <c:txPr>
-        <a:bodyPr/>
-        <a:lstStyle/>
-        <a:p>
-          <a:pPr>
-            <a:defRPr sz="1100">
-              <a:latin typeface="+mn-lt"/>
-              <a:cs typeface="+mn-lt"/>
-            </a:defRPr>
-          </a:pPr>
-          <a:endParaRPr lang="en-US"/>
-        </a:p>
-      </c:txPr>
-    </c:legend>
-    <c:plotVisOnly val="1"/>
-    <c:dispBlanksAs val="span"/>
-  </c:chart>
-  <c:spPr>
-    <a:noFill/>
-    <a:ln>
-      <a:noFill/>
-    </a:ln>
-    <a:effectLst/>
-  </c:spPr>
-  <c:externalData r:id="rId1">
-    <c:autoUpdate val="0"/>
-  </c:externalData>
-</c:chartSpace>
-</file>
-
-<file path=ppt/charts/chart6.xml><?xml version="1.0" encoding="utf-8"?>
-<c:chartSpace xmlns:c="http://schemas.openxmlformats.org/drawingml/2006/chart" xmlns:a="http://schemas.openxmlformats.org/drawingml/2006/main" xmlns:r="http://schemas.openxmlformats.org/officeDocument/2006/relationships">
-  <c:date1904 val="0"/>
-  <c:roundedCorners val="1"/>
-  <c:chart>
-    <c:title>
-      <c:tx>
-        <c:rich>
-          <a:bodyPr/>
-          <a:lstStyle/>
-          <a:p>
-            <a:pPr>
-              <a:defRPr sz="1300" b="0" i="0" u="none" strike="noStrike">
-                <a:solidFill>
-                  <a:srgbClr val="0F3D3E"/>
-                </a:solidFill>
-                <a:latin typeface="+mn-lt"/>
-              </a:defRPr>
-            </a:pPr>
-            <a:r>
-              <a:rPr sz="1300" b="0" i="0" u="none" strike="noStrike">
-                <a:solidFill>
-                  <a:srgbClr val="0F3D3E"/>
-                </a:solidFill>
-                <a:latin typeface="+mn-lt"/>
-              </a:rPr>
-              <a:t>Active learning · macro-F1 seri uji vs jumlah label</a:t>
-            </a:r>
-          </a:p>
-        </c:rich>
-      </c:tx>
-      <c:layout/>
-      <c:overlay val="0"/>
-    </c:title>
-    <c:autoTitleDeleted val="0"/>
-    <c:plotArea>
-      <c:layout/>
-      <c:lineChart>
-        <c:varyColors val="0"/>
-        <c:ser>
-          <c:idx val="0"/>
-          <c:order val="0"/>
-          <c:tx>
-            <c:strRef>
-              <c:f>Sheet1!$B$1</c:f>
-              <c:strCache>
-                <c:ptCount val="1"/>
-                <c:pt idx="0">
-                  <c:v>random</c:v>
-                </c:pt>
-              </c:strCache>
-            </c:strRef>
-          </c:tx>
-          <c:spPr>
-            <a:solidFill>
-              <a:srgbClr val="9AA5A6"/>
-            </a:solidFill>
-            <a:ln w="25400" cap="flat">
-              <a:solidFill>
-                <a:srgbClr val="9AA5A6"/>
-              </a:solidFill>
-              <a:prstDash val="solid"/>
-              <a:round/>
-            </a:ln>
-            <a:effectLst/>
-          </c:spPr>
-          <c:invertIfNegative val="0"/>
-          <c:dLbls>
-            <c:numFmt formatCode="#,##0" sourceLinked="0"/>
-            <c:txPr>
-              <a:bodyPr/>
-              <a:lstStyle/>
-              <a:p>
-                <a:pPr>
-                  <a:defRPr b="0" i="0" strike="noStrike" sz="1100" u="none">
-                    <a:solidFill>
-                      <a:srgbClr val="16262B"/>
-                    </a:solidFill>
-                    <a:latin typeface="+mn-lt"/>
-                  </a:defRPr>
-                </a:pPr>
-              </a:p>
-            </c:txPr>
-            <c:showLegendKey val="0"/>
-            <c:showVal val="0"/>
-            <c:showCatName val="0"/>
-            <c:showSerName val="0"/>
-            <c:showPercent val="0"/>
-            <c:showBubbleSize val="0"/>
-            <c:showLeaderLines val="0"/>
-          </c:dLbls>
-          <c:marker>
-            <c:symbol val="circle"/>
-            <c:size val="4"/>
-            <c:spPr>
-              <a:solidFill>
-                <a:srgbClr val="9AA5A6"/>
-              </a:solidFill>
-              <a:ln w="9525" cap="flat">
-                <a:solidFill>
-                  <a:srgbClr val="9AA5A6"/>
-                </a:solidFill>
-                <a:prstDash val="solid"/>
-                <a:round/>
-              </a:ln>
-              <a:effectLst/>
-            </c:spPr>
-          </c:marker>
-          <c:cat>
-            <c:multiLvlStrRef>
-              <c:f>Sheet1!$A$2:$A$17</c:f>
-              <c:multiLvlStrCache>
-                <c:ptCount val="16"/>
-                <c:lvl>
-                  <c:pt idx="0">
-                    <c:v>40</c:v>
-                  </c:pt>
-                  <c:pt idx="1">
-                    <c:v>80</c:v>
-                  </c:pt>
-                  <c:pt idx="2">
-                    <c:v>120</c:v>
-                  </c:pt>
-                  <c:pt idx="3">
-                    <c:v>160</c:v>
-                  </c:pt>
-                  <c:pt idx="4">
-                    <c:v>200</c:v>
-                  </c:pt>
-                  <c:pt idx="5">
-                    <c:v>240</c:v>
-                  </c:pt>
-                  <c:pt idx="6">
-                    <c:v>280</c:v>
-                  </c:pt>
-                  <c:pt idx="7">
-                    <c:v>320</c:v>
-                  </c:pt>
-                  <c:pt idx="8">
-                    <c:v>360</c:v>
-                  </c:pt>
-                  <c:pt idx="9">
-                    <c:v>400</c:v>
-                  </c:pt>
-                  <c:pt idx="10">
-                    <c:v>440</c:v>
-                  </c:pt>
-                  <c:pt idx="11">
-                    <c:v>480</c:v>
-                  </c:pt>
-                  <c:pt idx="12">
-                    <c:v>520</c:v>
-                  </c:pt>
-                  <c:pt idx="13">
-                    <c:v>560</c:v>
-                  </c:pt>
-                  <c:pt idx="14">
-                    <c:v>600</c:v>
-                  </c:pt>
-                  <c:pt idx="15">
-                    <c:v>640</c:v>
-                  </c:pt>
-                </c:lvl>
-              </c:multiLvlStrCache>
-            </c:multiLvlStrRef>
-          </c:cat>
-          <c:val>
-            <c:numRef>
-              <c:f>Sheet1!$B$2:$B$17</c:f>
-              <c:numCache>
-                <c:formatCode>General</c:formatCode>
-                <c:ptCount val="16"/>
-                <c:pt idx="0">
-                  <c:v>0.828</c:v>
-                </c:pt>
-                <c:pt idx="1">
-                  <c:v>0.825</c:v>
-                </c:pt>
-                <c:pt idx="2">
-                  <c:v>0.854</c:v>
-                </c:pt>
-                <c:pt idx="3">
-                  <c:v>0.862</c:v>
-                </c:pt>
-                <c:pt idx="4">
-                  <c:v>0.825</c:v>
-                </c:pt>
-                <c:pt idx="5">
-                  <c:v>0.84</c:v>
-                </c:pt>
-                <c:pt idx="6">
-                  <c:v>0.848</c:v>
-                </c:pt>
-                <c:pt idx="7">
-                  <c:v>0.865</c:v>
-                </c:pt>
-                <c:pt idx="8">
-                  <c:v>0.862</c:v>
-                </c:pt>
-                <c:pt idx="9">
-                  <c:v>0.867</c:v>
-                </c:pt>
-                <c:pt idx="10">
-                  <c:v>0.863</c:v>
-                </c:pt>
-                <c:pt idx="11">
-                  <c:v>0.867</c:v>
-                </c:pt>
-                <c:pt idx="12">
-                  <c:v>0.874</c:v>
-                </c:pt>
-                <c:pt idx="13">
-                  <c:v>0.868</c:v>
-                </c:pt>
-                <c:pt idx="14">
-                  <c:v>0.878</c:v>
-                </c:pt>
-                <c:pt idx="15">
-                  <c:v>0.883</c:v>
-                </c:pt>
-              </c:numCache>
-            </c:numRef>
-          </c:val>
-          <c:smooth val="0"/>
-        </c:ser>
-        <c:ser>
-          <c:idx val="1"/>
-          <c:order val="1"/>
-          <c:tx>
-            <c:strRef>
-              <c:f>Sheet1!$C$1</c:f>
-              <c:strCache>
-                <c:ptCount val="1"/>
-                <c:pt idx="0">
-                  <c:v>uncertainty</c:v>
-                </c:pt>
-              </c:strCache>
-            </c:strRef>
-          </c:tx>
-          <c:spPr>
-            <a:solidFill>
-              <a:srgbClr val="2E6F95"/>
-            </a:solidFill>
-            <a:ln w="25400" cap="flat">
-              <a:solidFill>
-                <a:srgbClr val="2E6F95"/>
-              </a:solidFill>
-              <a:prstDash val="solid"/>
-              <a:round/>
-            </a:ln>
-            <a:effectLst/>
-          </c:spPr>
-          <c:invertIfNegative val="0"/>
-          <c:dLbls>
-            <c:numFmt formatCode="#,##0" sourceLinked="0"/>
-            <c:txPr>
-              <a:bodyPr/>
-              <a:lstStyle/>
-              <a:p>
-                <a:pPr>
-                  <a:defRPr b="0" i="0" strike="noStrike" sz="1100" u="none">
-                    <a:solidFill>
-                      <a:srgbClr val="16262B"/>
-                    </a:solidFill>
-                    <a:latin typeface="+mn-lt"/>
-                  </a:defRPr>
-                </a:pPr>
-              </a:p>
-            </c:txPr>
-            <c:showLegendKey val="0"/>
-            <c:showVal val="0"/>
-            <c:showCatName val="0"/>
-            <c:showSerName val="0"/>
-            <c:showPercent val="0"/>
-            <c:showBubbleSize val="0"/>
-            <c:showLeaderLines val="0"/>
-          </c:dLbls>
-          <c:marker>
-            <c:symbol val="circle"/>
-            <c:size val="4"/>
-            <c:spPr>
-              <a:solidFill>
-                <a:srgbClr val="2E6F95"/>
-              </a:solidFill>
-              <a:ln w="9525" cap="flat">
-                <a:solidFill>
-                  <a:srgbClr val="2E6F95"/>
-                </a:solidFill>
-                <a:prstDash val="solid"/>
-                <a:round/>
-              </a:ln>
-              <a:effectLst/>
-            </c:spPr>
-          </c:marker>
-          <c:cat>
-            <c:multiLvlStrRef>
-              <c:f>Sheet1!$A$2:$A$17</c:f>
-              <c:multiLvlStrCache>
-                <c:ptCount val="16"/>
-                <c:lvl>
-                  <c:pt idx="0">
-                    <c:v>40</c:v>
-                  </c:pt>
-                  <c:pt idx="1">
-                    <c:v>80</c:v>
-                  </c:pt>
-                  <c:pt idx="2">
-                    <c:v>120</c:v>
-                  </c:pt>
-                  <c:pt idx="3">
-                    <c:v>160</c:v>
-                  </c:pt>
-                  <c:pt idx="4">
-                    <c:v>200</c:v>
-                  </c:pt>
-                  <c:pt idx="5">
-                    <c:v>240</c:v>
-                  </c:pt>
-                  <c:pt idx="6">
-                    <c:v>280</c:v>
-                  </c:pt>
-                  <c:pt idx="7">
-                    <c:v>320</c:v>
-                  </c:pt>
-                  <c:pt idx="8">
-                    <c:v>360</c:v>
-                  </c:pt>
-                  <c:pt idx="9">
-                    <c:v>400</c:v>
-                  </c:pt>
-                  <c:pt idx="10">
-                    <c:v>440</c:v>
-                  </c:pt>
-                  <c:pt idx="11">
-                    <c:v>480</c:v>
-                  </c:pt>
-                  <c:pt idx="12">
-                    <c:v>520</c:v>
-                  </c:pt>
-                  <c:pt idx="13">
-                    <c:v>560</c:v>
-                  </c:pt>
-                  <c:pt idx="14">
-                    <c:v>600</c:v>
-                  </c:pt>
-                  <c:pt idx="15">
-                    <c:v>640</c:v>
-                  </c:pt>
-                </c:lvl>
-              </c:multiLvlStrCache>
-            </c:multiLvlStrRef>
-          </c:cat>
-          <c:val>
-            <c:numRef>
-              <c:f>Sheet1!$C$2:$C$17</c:f>
-              <c:numCache>
-                <c:formatCode>General</c:formatCode>
-                <c:ptCount val="16"/>
-                <c:pt idx="0">
-                  <c:v>0.828</c:v>
-                </c:pt>
-                <c:pt idx="1">
-                  <c:v>0.779</c:v>
-                </c:pt>
-                <c:pt idx="2">
-                  <c:v>0.818</c:v>
-                </c:pt>
-                <c:pt idx="3">
-                  <c:v>0.791</c:v>
-                </c:pt>
-                <c:pt idx="4">
-                  <c:v>0.826</c:v>
-                </c:pt>
-                <c:pt idx="5">
-                  <c:v>0.805</c:v>
-                </c:pt>
-                <c:pt idx="6">
-                  <c:v>0.802</c:v>
-                </c:pt>
-                <c:pt idx="7">
-                  <c:v>0.809</c:v>
-                </c:pt>
-                <c:pt idx="8">
-                  <c:v>0.804</c:v>
-                </c:pt>
-                <c:pt idx="9">
-                  <c:v>0.822</c:v>
-                </c:pt>
-                <c:pt idx="10">
-                  <c:v>0.812</c:v>
-                </c:pt>
-                <c:pt idx="11">
-                  <c:v>0.835</c:v>
-                </c:pt>
-                <c:pt idx="12">
-                  <c:v>0.847</c:v>
-                </c:pt>
-                <c:pt idx="13">
-                  <c:v>0.805</c:v>
-                </c:pt>
-                <c:pt idx="14">
-                  <c:v>0.806</c:v>
-                </c:pt>
-                <c:pt idx="15">
-                  <c:v>0.818</c:v>
-                </c:pt>
-              </c:numCache>
-            </c:numRef>
-          </c:val>
-          <c:smooth val="0"/>
-        </c:ser>
-        <c:ser>
-          <c:idx val="2"/>
-          <c:order val="2"/>
-          <c:tx>
-            <c:strRef>
-              <c:f>Sheet1!$D$1</c:f>
-              <c:strCache>
-                <c:ptCount val="1"/>
-                <c:pt idx="0">
-                  <c:v>diversity</c:v>
-                </c:pt>
-              </c:strCache>
-            </c:strRef>
-          </c:tx>
-          <c:spPr>
-            <a:solidFill>
-              <a:srgbClr val="6C8F7D"/>
-            </a:solidFill>
-            <a:ln w="25400" cap="flat">
-              <a:solidFill>
-                <a:srgbClr val="6C8F7D"/>
-              </a:solidFill>
-              <a:prstDash val="solid"/>
-              <a:round/>
-            </a:ln>
-            <a:effectLst/>
-          </c:spPr>
-          <c:invertIfNegative val="0"/>
-          <c:dLbls>
-            <c:numFmt formatCode="#,##0" sourceLinked="0"/>
-            <c:txPr>
-              <a:bodyPr/>
-              <a:lstStyle/>
-              <a:p>
-                <a:pPr>
-                  <a:defRPr b="0" i="0" strike="noStrike" sz="1100" u="none">
-                    <a:solidFill>
-                      <a:srgbClr val="16262B"/>
-                    </a:solidFill>
-                    <a:latin typeface="+mn-lt"/>
-                  </a:defRPr>
-                </a:pPr>
-              </a:p>
-            </c:txPr>
-            <c:showLegendKey val="0"/>
-            <c:showVal val="0"/>
-            <c:showCatName val="0"/>
-            <c:showSerName val="0"/>
-            <c:showPercent val="0"/>
-            <c:showBubbleSize val="0"/>
-            <c:showLeaderLines val="0"/>
-          </c:dLbls>
-          <c:marker>
-            <c:symbol val="circle"/>
-            <c:size val="4"/>
-            <c:spPr>
-              <a:solidFill>
-                <a:srgbClr val="6C8F7D"/>
-              </a:solidFill>
-              <a:ln w="9525" cap="flat">
-                <a:solidFill>
-                  <a:srgbClr val="6C8F7D"/>
-                </a:solidFill>
-                <a:prstDash val="solid"/>
-                <a:round/>
-              </a:ln>
-              <a:effectLst/>
-            </c:spPr>
-          </c:marker>
-          <c:cat>
-            <c:multiLvlStrRef>
-              <c:f>Sheet1!$A$2:$A$17</c:f>
-              <c:multiLvlStrCache>
-                <c:ptCount val="16"/>
-                <c:lvl>
-                  <c:pt idx="0">
-                    <c:v>40</c:v>
-                  </c:pt>
-                  <c:pt idx="1">
-                    <c:v>80</c:v>
-                  </c:pt>
-                  <c:pt idx="2">
-                    <c:v>120</c:v>
-                  </c:pt>
-                  <c:pt idx="3">
-                    <c:v>160</c:v>
-                  </c:pt>
-                  <c:pt idx="4">
-                    <c:v>200</c:v>
-                  </c:pt>
-                  <c:pt idx="5">
-                    <c:v>240</c:v>
-                  </c:pt>
-                  <c:pt idx="6">
-                    <c:v>280</c:v>
-                  </c:pt>
-                  <c:pt idx="7">
-                    <c:v>320</c:v>
-                  </c:pt>
-                  <c:pt idx="8">
-                    <c:v>360</c:v>
-                  </c:pt>
-                  <c:pt idx="9">
-                    <c:v>400</c:v>
-                  </c:pt>
-                  <c:pt idx="10">
-                    <c:v>440</c:v>
-                  </c:pt>
-                  <c:pt idx="11">
-                    <c:v>480</c:v>
-                  </c:pt>
-                  <c:pt idx="12">
-                    <c:v>520</c:v>
-                  </c:pt>
-                  <c:pt idx="13">
-                    <c:v>560</c:v>
-                  </c:pt>
-                  <c:pt idx="14">
-                    <c:v>600</c:v>
-                  </c:pt>
-                  <c:pt idx="15">
-                    <c:v>640</c:v>
-                  </c:pt>
-                </c:lvl>
-              </c:multiLvlStrCache>
-            </c:multiLvlStrRef>
-          </c:cat>
-          <c:val>
-            <c:numRef>
-              <c:f>Sheet1!$D$2:$D$17</c:f>
-              <c:numCache>
-                <c:formatCode>General</c:formatCode>
-                <c:ptCount val="16"/>
-                <c:pt idx="0">
-                  <c:v>0.828</c:v>
-                </c:pt>
-                <c:pt idx="1">
-                  <c:v>0.805</c:v>
-                </c:pt>
-                <c:pt idx="2">
-                  <c:v>0.802</c:v>
-                </c:pt>
-                <c:pt idx="3">
-                  <c:v>0.813</c:v>
-                </c:pt>
-                <c:pt idx="4">
-                  <c:v>0.815</c:v>
-                </c:pt>
-                <c:pt idx="5">
-                  <c:v>0.85</c:v>
-                </c:pt>
-                <c:pt idx="6">
-                  <c:v>0.852</c:v>
-                </c:pt>
-                <c:pt idx="7">
-                  <c:v>0.849</c:v>
-                </c:pt>
-                <c:pt idx="8">
-                  <c:v>0.843</c:v>
-                </c:pt>
-                <c:pt idx="9">
-                  <c:v>0.832</c:v>
-                </c:pt>
-                <c:pt idx="10">
-                  <c:v>0.837</c:v>
-                </c:pt>
-                <c:pt idx="11">
-                  <c:v>0.84</c:v>
-                </c:pt>
-                <c:pt idx="12">
-                  <c:v>0.838</c:v>
-                </c:pt>
-                <c:pt idx="13">
-                  <c:v>0.816</c:v>
-                </c:pt>
-                <c:pt idx="14">
-                  <c:v>0.822</c:v>
-                </c:pt>
-                <c:pt idx="15">
-                  <c:v>0.834</c:v>
-                </c:pt>
-              </c:numCache>
-            </c:numRef>
-          </c:val>
-          <c:smooth val="0"/>
-        </c:ser>
-        <c:ser>
-          <c:idx val="3"/>
-          <c:order val="3"/>
-          <c:tx>
-            <c:strRef>
-              <c:f>Sheet1!$E$1</c:f>
-              <c:strCache>
-                <c:ptCount val="1"/>
-                <c:pt idx="0">
-                  <c:v>bandit ε-greedy</c:v>
-                </c:pt>
-              </c:strCache>
-            </c:strRef>
-          </c:tx>
-          <c:spPr>
-            <a:solidFill>
-              <a:srgbClr val="E3A33B"/>
-            </a:solidFill>
-            <a:ln w="25400" cap="flat">
-              <a:solidFill>
-                <a:srgbClr val="E3A33B"/>
-              </a:solidFill>
-              <a:prstDash val="solid"/>
-              <a:round/>
-            </a:ln>
-            <a:effectLst/>
-          </c:spPr>
-          <c:invertIfNegative val="0"/>
-          <c:dLbls>
-            <c:numFmt formatCode="#,##0" sourceLinked="0"/>
-            <c:txPr>
-              <a:bodyPr/>
-              <a:lstStyle/>
-              <a:p>
-                <a:pPr>
-                  <a:defRPr b="0" i="0" strike="noStrike" sz="1100" u="none">
-                    <a:solidFill>
-                      <a:srgbClr val="16262B"/>
-                    </a:solidFill>
-                    <a:latin typeface="+mn-lt"/>
-                  </a:defRPr>
-                </a:pPr>
-              </a:p>
-            </c:txPr>
-            <c:showLegendKey val="0"/>
-            <c:showVal val="0"/>
-            <c:showCatName val="0"/>
-            <c:showSerName val="0"/>
-            <c:showPercent val="0"/>
-            <c:showBubbleSize val="0"/>
-            <c:showLeaderLines val="0"/>
-          </c:dLbls>
-          <c:marker>
-            <c:symbol val="circle"/>
-            <c:size val="4"/>
-            <c:spPr>
-              <a:solidFill>
-                <a:srgbClr val="E3A33B"/>
-              </a:solidFill>
-              <a:ln w="9525" cap="flat">
-                <a:solidFill>
-                  <a:srgbClr val="E3A33B"/>
-                </a:solidFill>
-                <a:prstDash val="solid"/>
-                <a:round/>
-              </a:ln>
-              <a:effectLst/>
-            </c:spPr>
-          </c:marker>
-          <c:cat>
-            <c:multiLvlStrRef>
-              <c:f>Sheet1!$A$2:$A$17</c:f>
-              <c:multiLvlStrCache>
-                <c:ptCount val="16"/>
-                <c:lvl>
-                  <c:pt idx="0">
-                    <c:v>40</c:v>
-                  </c:pt>
-                  <c:pt idx="1">
-                    <c:v>80</c:v>
-                  </c:pt>
-                  <c:pt idx="2">
-                    <c:v>120</c:v>
-                  </c:pt>
-                  <c:pt idx="3">
-                    <c:v>160</c:v>
-                  </c:pt>
-                  <c:pt idx="4">
-                    <c:v>200</c:v>
-                  </c:pt>
-                  <c:pt idx="5">
-                    <c:v>240</c:v>
-                  </c:pt>
-                  <c:pt idx="6">
-                    <c:v>280</c:v>
-                  </c:pt>
-                  <c:pt idx="7">
-                    <c:v>320</c:v>
-                  </c:pt>
-                  <c:pt idx="8">
-                    <c:v>360</c:v>
-                  </c:pt>
-                  <c:pt idx="9">
-                    <c:v>400</c:v>
-                  </c:pt>
-                  <c:pt idx="10">
-                    <c:v>440</c:v>
-                  </c:pt>
-                  <c:pt idx="11">
-                    <c:v>480</c:v>
-                  </c:pt>
-                  <c:pt idx="12">
-                    <c:v>520</c:v>
-                  </c:pt>
-                  <c:pt idx="13">
-                    <c:v>560</c:v>
-                  </c:pt>
-                  <c:pt idx="14">
-                    <c:v>600</c:v>
-                  </c:pt>
-                  <c:pt idx="15">
-                    <c:v>640</c:v>
-                  </c:pt>
-                </c:lvl>
-              </c:multiLvlStrCache>
-            </c:multiLvlStrRef>
-          </c:cat>
-          <c:val>
-            <c:numRef>
-              <c:f>Sheet1!$E$2:$E$17</c:f>
-              <c:numCache>
-                <c:formatCode>General</c:formatCode>
-                <c:ptCount val="16"/>
-                <c:pt idx="0">
-                  <c:v>0.828</c:v>
-                </c:pt>
-                <c:pt idx="1">
-                  <c:v>0.825</c:v>
-                </c:pt>
-                <c:pt idx="2">
-                  <c:v>0.824</c:v>
-                </c:pt>
-                <c:pt idx="3">
-                  <c:v>0.797</c:v>
-                </c:pt>
-                <c:pt idx="4">
-                  <c:v>0.85</c:v>
-                </c:pt>
-                <c:pt idx="5">
-                  <c:v>0.854</c:v>
-                </c:pt>
-                <c:pt idx="6">
-                  <c:v>0.871</c:v>
-                </c:pt>
-                <c:pt idx="7">
-                  <c:v>0.853</c:v>
-                </c:pt>
-                <c:pt idx="8">
-                  <c:v>0.787</c:v>
-                </c:pt>
-                <c:pt idx="9">
-                  <c:v>0.844</c:v>
-                </c:pt>
-                <c:pt idx="10">
-                  <c:v>0.821</c:v>
-                </c:pt>
-                <c:pt idx="11">
-                  <c:v>0.828</c:v>
-                </c:pt>
-                <c:pt idx="12">
-                  <c:v>0.83</c:v>
-                </c:pt>
-                <c:pt idx="13">
-                  <c:v>0.815</c:v>
-                </c:pt>
-                <c:pt idx="14">
-                  <c:v>0.841</c:v>
-                </c:pt>
-                <c:pt idx="15">
-                  <c:v>0.843</c:v>
-                </c:pt>
-              </c:numCache>
-            </c:numRef>
-          </c:val>
-          <c:smooth val="0"/>
-        </c:ser>
-        <c:ser>
-          <c:idx val="4"/>
-          <c:order val="4"/>
-          <c:tx>
-            <c:strRef>
-              <c:f>Sheet1!$F$1</c:f>
-              <c:strCache>
-                <c:ptCount val="1"/>
-                <c:pt idx="0">
-                  <c:v>bandit UCB1</c:v>
-                </c:pt>
-              </c:strCache>
-            </c:strRef>
-          </c:tx>
-          <c:spPr>
-            <a:solidFill>
-              <a:srgbClr val="C4553B"/>
-            </a:solidFill>
-            <a:ln w="25400" cap="flat">
-              <a:solidFill>
-                <a:srgbClr val="C4553B"/>
-              </a:solidFill>
-              <a:prstDash val="solid"/>
-              <a:round/>
-            </a:ln>
-            <a:effectLst/>
-          </c:spPr>
-          <c:invertIfNegative val="0"/>
-          <c:dLbls>
-            <c:numFmt formatCode="#,##0" sourceLinked="0"/>
-            <c:txPr>
-              <a:bodyPr/>
-              <a:lstStyle/>
-              <a:p>
-                <a:pPr>
-                  <a:defRPr b="0" i="0" strike="noStrike" sz="1100" u="none">
-                    <a:solidFill>
-                      <a:srgbClr val="16262B"/>
-                    </a:solidFill>
-                    <a:latin typeface="+mn-lt"/>
-                  </a:defRPr>
-                </a:pPr>
-              </a:p>
-            </c:txPr>
-            <c:showLegendKey val="0"/>
-            <c:showVal val="0"/>
-            <c:showCatName val="0"/>
-            <c:showSerName val="0"/>
-            <c:showPercent val="0"/>
-            <c:showBubbleSize val="0"/>
-            <c:showLeaderLines val="0"/>
-          </c:dLbls>
-          <c:marker>
-            <c:symbol val="circle"/>
-            <c:size val="4"/>
-            <c:spPr>
-              <a:solidFill>
-                <a:srgbClr val="C4553B"/>
-              </a:solidFill>
-              <a:ln w="9525" cap="flat">
-                <a:solidFill>
-                  <a:srgbClr val="C4553B"/>
-                </a:solidFill>
-                <a:prstDash val="solid"/>
-                <a:round/>
-              </a:ln>
-              <a:effectLst/>
-            </c:spPr>
-          </c:marker>
-          <c:cat>
-            <c:multiLvlStrRef>
-              <c:f>Sheet1!$A$2:$A$17</c:f>
-              <c:multiLvlStrCache>
-                <c:ptCount val="16"/>
-                <c:lvl>
-                  <c:pt idx="0">
-                    <c:v>40</c:v>
-                  </c:pt>
-                  <c:pt idx="1">
-                    <c:v>80</c:v>
-                  </c:pt>
-                  <c:pt idx="2">
-                    <c:v>120</c:v>
-                  </c:pt>
-                  <c:pt idx="3">
-                    <c:v>160</c:v>
-                  </c:pt>
-                  <c:pt idx="4">
-                    <c:v>200</c:v>
-                  </c:pt>
-                  <c:pt idx="5">
-                    <c:v>240</c:v>
-                  </c:pt>
-                  <c:pt idx="6">
-                    <c:v>280</c:v>
-                  </c:pt>
-                  <c:pt idx="7">
-                    <c:v>320</c:v>
-                  </c:pt>
-                  <c:pt idx="8">
-                    <c:v>360</c:v>
-                  </c:pt>
-                  <c:pt idx="9">
-                    <c:v>400</c:v>
-                  </c:pt>
-                  <c:pt idx="10">
-                    <c:v>440</c:v>
-                  </c:pt>
-                  <c:pt idx="11">
-                    <c:v>480</c:v>
-                  </c:pt>
-                  <c:pt idx="12">
-                    <c:v>520</c:v>
-                  </c:pt>
-                  <c:pt idx="13">
-                    <c:v>560</c:v>
-                  </c:pt>
-                  <c:pt idx="14">
-                    <c:v>600</c:v>
-                  </c:pt>
-                  <c:pt idx="15">
-                    <c:v>640</c:v>
-                  </c:pt>
-                </c:lvl>
-              </c:multiLvlStrCache>
-            </c:multiLvlStrRef>
-          </c:cat>
-          <c:val>
-            <c:numRef>
-              <c:f>Sheet1!$F$2:$F$17</c:f>
-              <c:numCache>
-                <c:formatCode>General</c:formatCode>
-                <c:ptCount val="16"/>
-                <c:pt idx="0">
-                  <c:v>0.828</c:v>
-                </c:pt>
-                <c:pt idx="1">
-                  <c:v>0.825</c:v>
-                </c:pt>
-                <c:pt idx="2">
-                  <c:v>0.824</c:v>
-                </c:pt>
-                <c:pt idx="3">
-                  <c:v>0.797</c:v>
-                </c:pt>
-                <c:pt idx="4">
-                  <c:v>0.849</c:v>
-                </c:pt>
-                <c:pt idx="5">
-                  <c:v>0.833</c:v>
-                </c:pt>
-                <c:pt idx="6">
-                  <c:v>0.77</c:v>
-                </c:pt>
-                <c:pt idx="7">
-                  <c:v>0.764</c:v>
-                </c:pt>
-                <c:pt idx="8">
-                  <c:v>0.766</c:v>
-                </c:pt>
-                <c:pt idx="9">
-                  <c:v>0.829</c:v>
-                </c:pt>
-                <c:pt idx="10">
-                  <c:v>0.835</c:v>
-                </c:pt>
-                <c:pt idx="11">
-                  <c:v>0.836</c:v>
-                </c:pt>
-                <c:pt idx="12">
-                  <c:v>0.784</c:v>
-                </c:pt>
-                <c:pt idx="13">
-                  <c:v>0.803</c:v>
-                </c:pt>
-                <c:pt idx="14">
-                  <c:v>0.795</c:v>
-                </c:pt>
-                <c:pt idx="15">
-                  <c:v>0.804</c:v>
-                </c:pt>
-              </c:numCache>
-            </c:numRef>
-          </c:val>
-          <c:smooth val="0"/>
-        </c:ser>
-        <c:dLbls>
-          <c:numFmt formatCode="#,##0" sourceLinked="0"/>
-          <c:txPr>
-            <a:bodyPr/>
-            <a:lstStyle/>
-            <a:p>
-              <a:pPr>
-                <a:defRPr b="0" i="0" strike="noStrike" sz="1100" u="none">
-                  <a:solidFill>
-                    <a:srgbClr val="16262B"/>
-                  </a:solidFill>
-                  <a:latin typeface="+mn-lt"/>
-                </a:defRPr>
-              </a:pPr>
-            </a:p>
-          </c:txPr>
-          <c:showLegendKey val="0"/>
-          <c:showVal val="0"/>
-          <c:showCatName val="0"/>
-          <c:showSerName val="0"/>
-          <c:showPercent val="0"/>
-          <c:showBubbleSize val="0"/>
-          <c:showLeaderLines val="0"/>
-        </c:dLbls>
-        <c:marker val="1"/>
-        <c:axId val="2094734554"/>
-        <c:axId val="2094734552"/>
-        <c:axId val="2094734556"/>
-      </c:lineChart>
-      <c:catAx>
-        <c:axId val="2094734554"/>
-        <c:scaling>
-          <c:orientation val="minMax"/>
-        </c:scaling>
-        <c:delete val="0"/>
-        <c:axPos val="b"/>
-        <c:numFmt formatCode="General" sourceLinked="1"/>
-        <c:majorTickMark val="out"/>
-        <c:minorTickMark val="none"/>
-        <c:tickLblPos val="low"/>
-        <c:spPr>
-          <a:ln w="12700" cap="flat">
-            <a:solidFill>
-              <a:srgbClr val="888888"/>
-            </a:solidFill>
-            <a:prstDash val="solid"/>
-            <a:round/>
-          </a:ln>
-        </c:spPr>
-        <c:txPr>
-          <a:bodyPr/>
-          <a:lstStyle/>
-          <a:p>
-            <a:pPr>
-              <a:defRPr sz="1000" b="0" i="0" u="none" strike="noStrike">
-                <a:solidFill>
-                  <a:srgbClr val="56676A"/>
-                </a:solidFill>
-                <a:latin typeface="+mn-lt"/>
-              </a:defRPr>
-            </a:pPr>
-            <a:endParaRPr lang="en-US"/>
-          </a:p>
-        </c:txPr>
-        <c:crossAx val="2094734552"/>
-        <c:crosses val="autoZero"/>
-        <c:auto val="1"/>
-        <c:lblAlgn val="ctr"/>
-        <c:noMultiLvlLbl val="1"/>
-      </c:catAx>
-      <c:valAx>
-        <c:axId val="2094734552"/>
-        <c:scaling>
-          <c:orientation val="minMax"/>
-          <c:max val="0.95"/>
-          <c:min val="0.7"/>
-        </c:scaling>
-        <c:delete val="0"/>
-        <c:axPos val="l"/>
-        <c:majorGridlines>
-          <c:spPr>
-            <a:ln w="9525" cap="flat">
-              <a:solidFill>
-                <a:srgbClr val="E1E8E6"/>
-              </a:solidFill>
-              <a:prstDash val="solid"/>
-              <a:round/>
-            </a:ln>
-          </c:spPr>
-        </c:majorGridlines>
-        <c:numFmt formatCode="0.00" sourceLinked="0"/>
-        <c:majorTickMark val="out"/>
-        <c:minorTickMark val="none"/>
-        <c:tickLblPos val="nextTo"/>
-        <c:spPr>
-          <a:ln w="12700" cap="flat">
-            <a:solidFill>
-              <a:srgbClr val="888888"/>
-            </a:solidFill>
-            <a:prstDash val="solid"/>
-            <a:round/>
-          </a:ln>
-        </c:spPr>
-        <c:txPr>
-          <a:bodyPr/>
-          <a:lstStyle/>
-          <a:p>
-            <a:pPr>
-              <a:defRPr sz="1100" b="0" i="0" u="none" strike="noStrike">
-                <a:solidFill>
-                  <a:srgbClr val="56676A"/>
-                </a:solidFill>
-                <a:latin typeface="+mn-lt"/>
-              </a:defRPr>
-            </a:pPr>
-            <a:endParaRPr lang="en-US"/>
-          </a:p>
-        </c:txPr>
-        <c:crossAx val="2094734554"/>
-        <c:crosses val="autoZero"/>
-        <c:crossBetween val="between"/>
-      </c:valAx>
-      <c:spPr>
-        <a:noFill/>
-        <a:ln>
-          <a:noFill/>
-        </a:ln>
-        <a:effectLst/>
-      </c:spPr>
-    </c:plotArea>
-    <c:legend>
-      <c:legendPos val="b"/>
-      <c:overlay val="0"/>
-      <c:txPr>
-        <a:bodyPr/>
-        <a:lstStyle/>
-        <a:p>
-          <a:pPr>
-            <a:defRPr sz="1100">
-              <a:latin typeface="+mn-lt"/>
-              <a:cs typeface="+mn-lt"/>
-            </a:defRPr>
-          </a:pPr>
-          <a:endParaRPr lang="en-US"/>
-        </a:p>
-      </c:txPr>
-    </c:legend>
-    <c:plotVisOnly val="1"/>
-    <c:dispBlanksAs val="span"/>
-  </c:chart>
-  <c:spPr>
-    <a:noFill/>
-    <a:ln>
-      <a:noFill/>
-    </a:ln>
-    <a:effectLst/>
-  </c:spPr>
-  <c:externalData r:id="rId1">
-    <c:autoUpdate val="0"/>
-  </c:externalData>
-</c:chartSpace>
-</file>
-
-<file path=ppt/charts/chart7.xml><?xml version="1.0" encoding="utf-8"?>
-<c:chartSpace xmlns:c="http://schemas.openxmlformats.org/drawingml/2006/chart" xmlns:a="http://schemas.openxmlformats.org/drawingml/2006/main" xmlns:r="http://schemas.openxmlformats.org/officeDocument/2006/relationships">
-  <c:date1904 val="0"/>
-  <c:roundedCorners val="1"/>
-  <c:chart>
-    <c:title>
-      <c:tx>
-        <c:rich>
-          <a:bodyPr/>
-          <a:lstStyle/>
-          <a:p>
-            <a:pPr>
-              <a:defRPr sz="1300" b="0" i="0" u="none" strike="noStrike">
-                <a:solidFill>
-                  <a:srgbClr val="0F3D3E"/>
-                </a:solidFill>
-                <a:latin typeface="+mn-lt"/>
-              </a:defRPr>
-            </a:pPr>
-            <a:r>
-              <a:rPr sz="1300" b="0" i="0" u="none" strike="noStrike">
-                <a:solidFill>
-                  <a:srgbClr val="0F3D3E"/>
-                </a:solidFill>
-                <a:latin typeface="+mn-lt"/>
-              </a:rPr>
-              <a:t>Tambah batch vs tambah baris (XGBoost biner)</a:t>
-            </a:r>
-          </a:p>
-        </c:rich>
-      </c:tx>
-      <c:layout/>
-      <c:overlay val="0"/>
-    </c:title>
-    <c:autoTitleDeleted val="0"/>
-    <c:plotArea>
-      <c:layout/>
-      <c:barChart>
-        <c:barDir val="bar"/>
-        <c:grouping val="clustered"/>
-        <c:varyColors val="0"/>
-        <c:ser>
-          <c:idx val="0"/>
-          <c:order val="0"/>
-          <c:tx>
-            <c:strRef>
-              <c:f>Sheet1!$B$1</c:f>
-              <c:strCache>
-                <c:ptCount val="1"/>
-                <c:pt idx="0">
-                  <c:v>macro-F1</c:v>
-                </c:pt>
-              </c:strCache>
-            </c:strRef>
-          </c:tx>
-          <c:spPr>
-            <a:solidFill>
-              <a:srgbClr val="0F5257"/>
-            </a:solidFill>
-            <a:effectLst/>
-          </c:spPr>
-          <c:invertIfNegative val="0"/>
-          <c:dLbls>
-            <c:numFmt formatCode="0.00" sourceLinked="0"/>
-            <c:txPr>
-              <a:bodyPr/>
-              <a:lstStyle/>
-              <a:p>
-                <a:pPr>
-                  <a:defRPr b="0" i="0" strike="noStrike" sz="1100" u="none">
-                    <a:solidFill>
-                      <a:srgbClr val="16262B"/>
-                    </a:solidFill>
-                    <a:latin typeface="+mn-lt"/>
-                  </a:defRPr>
-                </a:pPr>
-              </a:p>
-            </c:txPr>
-            <c:showLegendKey val="0"/>
-            <c:showVal val="1"/>
-            <c:showCatName val="0"/>
-            <c:showSerName val="0"/>
-            <c:showPercent val="0"/>
-            <c:showBubbleSize val="0"/>
-            <c:showLeaderLines val="0"/>
-          </c:dLbls>
-          <c:cat>
-            <c:multiLvlStrRef>
-              <c:f>Sheet1!$A$2:$A$8</c:f>
-              <c:multiLvlStrCache>
-                <c:ptCount val="7"/>
-                <c:lvl>
-                  <c:pt idx="0">
-                    <c:v>1 seri</c:v>
-                  </c:pt>
-                  <c:pt idx="1">
-                    <c:v>2 seri</c:v>
-                  </c:pt>
-                  <c:pt idx="2">
-                    <c:v>3 seri</c:v>
-                  </c:pt>
-                  <c:pt idx="3">
-                    <c:v>4 seri</c:v>
-                  </c:pt>
-                  <c:pt idx="4">
-                    <c:v>4 seri · 640 baris</c:v>
-                  </c:pt>
-                  <c:pt idx="5">
-                    <c:v>4 seri · 160 baris</c:v>
-                  </c:pt>
-                  <c:pt idx="6">
-                    <c:v>4 seri · 40 baris</c:v>
-                  </c:pt>
-                </c:lvl>
-              </c:multiLvlStrCache>
-            </c:multiLvlStrRef>
-          </c:cat>
-          <c:val>
-            <c:numRef>
-              <c:f>Sheet1!$B$2:$B$8</c:f>
-              <c:numCache>
-                <c:formatCode>General</c:formatCode>
-                <c:ptCount val="7"/>
-                <c:pt idx="0">
-                  <c:v>0.717</c:v>
-                </c:pt>
-                <c:pt idx="1">
-                  <c:v>0.746</c:v>
-                </c:pt>
-                <c:pt idx="2">
-                  <c:v>0.833</c:v>
-                </c:pt>
-                <c:pt idx="3">
-                  <c:v>0.911</c:v>
-                </c:pt>
-                <c:pt idx="4">
-                  <c:v>0.874</c:v>
-                </c:pt>
-                <c:pt idx="5">
-                  <c:v>0.872</c:v>
-                </c:pt>
-                <c:pt idx="6">
-                  <c:v>0.825</c:v>
-                </c:pt>
-              </c:numCache>
-            </c:numRef>
-          </c:val>
-        </c:ser>
-        <c:dLbls>
-          <c:numFmt formatCode="0.00" sourceLinked="0"/>
-          <c:txPr>
-            <a:bodyPr/>
-            <a:lstStyle/>
-            <a:p>
-              <a:pPr>
-                <a:defRPr b="0" i="0" strike="noStrike" sz="1100" u="none">
-                  <a:solidFill>
-                    <a:srgbClr val="16262B"/>
-                  </a:solidFill>
-                  <a:latin typeface="+mn-lt"/>
-                </a:defRPr>
-              </a:pPr>
-            </a:p>
-          </c:txPr>
-          <c:showLegendKey val="0"/>
-          <c:showVal val="1"/>
-          <c:showCatName val="0"/>
-          <c:showSerName val="0"/>
-          <c:showPercent val="0"/>
-          <c:showBubbleSize val="0"/>
-          <c:showLeaderLines val="0"/>
-        </c:dLbls>
-        <c:gapWidth val="150"/>
-        <c:overlap val="0"/>
-        <c:axId val="2094734554"/>
-        <c:axId val="2094734552"/>
-        <c:axId val="2094734556"/>
-      </c:barChart>
-      <c:catAx>
-        <c:axId val="2094734554"/>
-        <c:scaling>
-          <c:orientation val="maxMin"/>
-        </c:scaling>
-        <c:delete val="0"/>
-        <c:axPos val="l"/>
-        <c:numFmt formatCode="General" sourceLinked="1"/>
-        <c:majorTickMark val="out"/>
-        <c:minorTickMark val="none"/>
-        <c:tickLblPos val="nextTo"/>
-        <c:spPr>
-          <a:ln w="12700" cap="flat">
-            <a:solidFill>
-              <a:srgbClr val="888888"/>
-            </a:solidFill>
-            <a:prstDash val="solid"/>
-            <a:round/>
-          </a:ln>
-        </c:spPr>
-        <c:txPr>
-          <a:bodyPr/>
-          <a:lstStyle/>
-          <a:p>
-            <a:pPr>
-              <a:defRPr sz="1100" b="0" i="0" u="none" strike="noStrike">
-                <a:solidFill>
-                  <a:srgbClr val="56676A"/>
-                </a:solidFill>
-                <a:latin typeface="+mn-lt"/>
-              </a:defRPr>
-            </a:pPr>
-            <a:endParaRPr lang="en-US"/>
-          </a:p>
-        </c:txPr>
-        <c:crossAx val="2094734552"/>
-        <c:crosses val="autoZero"/>
-        <c:auto val="1"/>
-        <c:lblAlgn val="ctr"/>
-        <c:noMultiLvlLbl val="1"/>
-      </c:catAx>
-      <c:valAx>
-        <c:axId val="2094734552"/>
-        <c:scaling>
-          <c:orientation val="minMax"/>
-          <c:max val="1"/>
-          <c:min val="0"/>
-        </c:scaling>
-        <c:delete val="0"/>
-        <c:axPos val="b"/>
-        <c:majorGridlines>
-          <c:spPr>
-            <a:ln w="9525" cap="flat">
-              <a:solidFill>
-                <a:srgbClr val="E1E8E6"/>
-              </a:solidFill>
-              <a:prstDash val="solid"/>
-              <a:round/>
-            </a:ln>
-          </c:spPr>
-        </c:majorGridlines>
-        <c:numFmt formatCode="General" sourceLinked="0"/>
-        <c:majorTickMark val="out"/>
-        <c:minorTickMark val="none"/>
-        <c:tickLblPos val="low"/>
-        <c:spPr>
-          <a:ln w="12700" cap="flat">
-            <a:solidFill>
-              <a:srgbClr val="888888"/>
-            </a:solidFill>
-            <a:prstDash val="solid"/>
-            <a:round/>
-          </a:ln>
-        </c:spPr>
-        <c:txPr>
-          <a:bodyPr/>
-          <a:lstStyle/>
-          <a:p>
-            <a:pPr>
-              <a:defRPr sz="1100" b="0" i="0" u="none" strike="noStrike">
-                <a:solidFill>
-                  <a:srgbClr val="56676A"/>
-                </a:solidFill>
-                <a:latin typeface="+mn-lt"/>
-              </a:defRPr>
-            </a:pPr>
-            <a:endParaRPr lang="en-US"/>
-          </a:p>
-        </c:txPr>
-        <c:crossAx val="2094734554"/>
-        <c:crosses val="autoZero"/>
-        <c:crossBetween val="between"/>
-      </c:valAx>
-      <c:spPr>
-        <a:noFill/>
-        <a:ln>
-          <a:noFill/>
-        </a:ln>
-        <a:effectLst/>
-      </c:spPr>
-    </c:plotArea>
-    <c:plotVisOnly val="1"/>
-    <c:dispBlanksAs val="span"/>
-  </c:chart>
-  <c:spPr>
-    <a:noFill/>
-    <a:ln>
-      <a:noFill/>
-    </a:ln>
-    <a:effectLst/>
-  </c:spPr>
-  <c:externalData r:id="rId1">
-    <c:autoUpdate val="0"/>
-  </c:externalData>
-</c:chartSpace>
-</file>
-
-<file path=ppt/charts/chart8.xml><?xml version="1.0" encoding="utf-8"?>
-<c:chartSpace xmlns:c="http://schemas.openxmlformats.org/drawingml/2006/chart" xmlns:a="http://schemas.openxmlformats.org/drawingml/2006/main" xmlns:r="http://schemas.openxmlformats.org/officeDocument/2006/relationships">
-  <c:date1904 val="0"/>
-  <c:roundedCorners val="1"/>
-  <c:chart>
-    <c:title>
-      <c:tx>
-        <c:rich>
-          <a:bodyPr/>
-          <a:lstStyle/>
-          <a:p>
-            <a:pPr>
-              <a:defRPr sz="1300" b="0" i="0" u="none" strike="noStrike">
-                <a:solidFill>
-                  <a:srgbClr val="0F3D3E"/>
-                </a:solidFill>
-                <a:latin typeface="+mn-lt"/>
-              </a:defRPr>
-            </a:pPr>
-            <a:r>
-              <a:rPr sz="1300" b="0" i="0" u="none" strike="noStrike">
-                <a:solidFill>
-                  <a:srgbClr val="0F3D3E"/>
-                </a:solidFill>
-                <a:latin typeface="+mn-lt"/>
-              </a:rPr>
-              <a:t>Kelarutan · LightGBM+Optuna</a:t>
-            </a:r>
-          </a:p>
-        </c:rich>
-      </c:tx>
-      <c:layout/>
-      <c:overlay val="0"/>
-    </c:title>
-    <c:autoTitleDeleted val="0"/>
-    <c:plotArea>
-      <c:layout/>
-      <c:barChart>
-        <c:barDir val="bar"/>
-        <c:grouping val="clustered"/>
-        <c:varyColors val="0"/>
-        <c:ser>
-          <c:idx val="0"/>
-          <c:order val="0"/>
-          <c:tx>
-            <c:strRef>
-              <c:f>Sheet1!$B$1</c:f>
-              <c:strCache>
-                <c:ptCount val="1"/>
-                <c:pt idx="0">
-                  <c:v>mean |SHAP|</c:v>
-                </c:pt>
-              </c:strCache>
-            </c:strRef>
-          </c:tx>
-          <c:spPr>
-            <a:solidFill>
-              <a:srgbClr val="0F5257"/>
-            </a:solidFill>
-            <a:effectLst/>
-          </c:spPr>
-          <c:invertIfNegative val="0"/>
-          <c:dLbls>
-            <c:numFmt formatCode="0.00" sourceLinked="0"/>
-            <c:txPr>
-              <a:bodyPr/>
-              <a:lstStyle/>
-              <a:p>
-                <a:pPr>
-                  <a:defRPr b="0" i="0" strike="noStrike" sz="1100" u="none">
-                    <a:solidFill>
-                      <a:srgbClr val="16262B"/>
-                    </a:solidFill>
-                    <a:latin typeface="+mn-lt"/>
-                  </a:defRPr>
-                </a:pPr>
-              </a:p>
-            </c:txPr>
-            <c:showLegendKey val="0"/>
-            <c:showVal val="1"/>
-            <c:showCatName val="0"/>
-            <c:showSerName val="0"/>
-            <c:showPercent val="0"/>
-            <c:showBubbleSize val="0"/>
-            <c:showLeaderLines val="0"/>
-          </c:dLbls>
-          <c:cat>
-            <c:multiLvlStrRef>
-              <c:f>Sheet1!$A$2:$A$9</c:f>
-              <c:multiLvlStrCache>
-                <c:ptCount val="8"/>
-                <c:lvl>
-                  <c:pt idx="0">
-                    <c:v>MolLogP</c:v>
-                  </c:pt>
-                  <c:pt idx="1">
-                    <c:v>MolMR</c:v>
-                  </c:pt>
-                  <c:pt idx="2">
-                    <c:v>PEOE_VSA6</c:v>
-                  </c:pt>
-                  <c:pt idx="3">
-                    <c:v>LabuteASA</c:v>
-                  </c:pt>
-                  <c:pt idx="4">
-                    <c:v>SlogP_VSA2</c:v>
-                  </c:pt>
-                  <c:pt idx="5">
-                    <c:v>MinPartialCharge</c:v>
-                  </c:pt>
-                  <c:pt idx="6">
-                    <c:v>HeavyAtomMolWt</c:v>
-                  </c:pt>
-                  <c:pt idx="7">
-                    <c:v>VSA_EState9</c:v>
-                  </c:pt>
-                </c:lvl>
-              </c:multiLvlStrCache>
-            </c:multiLvlStrRef>
-          </c:cat>
-          <c:val>
-            <c:numRef>
-              <c:f>Sheet1!$B$2:$B$9</c:f>
-              <c:numCache>
-                <c:formatCode>General</c:formatCode>
-                <c:ptCount val="8"/>
-                <c:pt idx="0">
-                  <c:v>0.577</c:v>
-                </c:pt>
-                <c:pt idx="1">
-                  <c:v>0.32</c:v>
-                </c:pt>
-                <c:pt idx="2">
-                  <c:v>0.216</c:v>
-                </c:pt>
-                <c:pt idx="3">
-                  <c:v>0.137</c:v>
-                </c:pt>
-                <c:pt idx="4">
-                  <c:v>0.129</c:v>
-                </c:pt>
-                <c:pt idx="5">
-                  <c:v>0.102</c:v>
-                </c:pt>
-                <c:pt idx="6">
-                  <c:v>0.101</c:v>
-                </c:pt>
-                <c:pt idx="7">
-                  <c:v>0.089</c:v>
-                </c:pt>
-              </c:numCache>
-            </c:numRef>
-          </c:val>
-        </c:ser>
-        <c:dLbls>
-          <c:numFmt formatCode="0.00" sourceLinked="0"/>
-          <c:txPr>
-            <a:bodyPr/>
-            <a:lstStyle/>
-            <a:p>
-              <a:pPr>
-                <a:defRPr b="0" i="0" strike="noStrike" sz="1100" u="none">
-                  <a:solidFill>
-                    <a:srgbClr val="16262B"/>
-                  </a:solidFill>
-                  <a:latin typeface="+mn-lt"/>
-                </a:defRPr>
-              </a:pPr>
-            </a:p>
-          </c:txPr>
-          <c:showLegendKey val="0"/>
-          <c:showVal val="1"/>
-          <c:showCatName val="0"/>
-          <c:showSerName val="0"/>
-          <c:showPercent val="0"/>
-          <c:showBubbleSize val="0"/>
-          <c:showLeaderLines val="0"/>
-        </c:dLbls>
-        <c:gapWidth val="150"/>
-        <c:overlap val="0"/>
-        <c:axId val="2094734554"/>
-        <c:axId val="2094734552"/>
-        <c:axId val="2094734556"/>
-      </c:barChart>
-      <c:catAx>
-        <c:axId val="2094734554"/>
-        <c:scaling>
-          <c:orientation val="maxMin"/>
-        </c:scaling>
-        <c:delete val="0"/>
-        <c:axPos val="l"/>
-        <c:numFmt formatCode="General" sourceLinked="1"/>
-        <c:majorTickMark val="out"/>
-        <c:minorTickMark val="none"/>
-        <c:tickLblPos val="nextTo"/>
-        <c:spPr>
-          <a:ln w="12700" cap="flat">
-            <a:solidFill>
-              <a:srgbClr val="888888"/>
-            </a:solidFill>
-            <a:prstDash val="solid"/>
-            <a:round/>
-          </a:ln>
-        </c:spPr>
-        <c:txPr>
-          <a:bodyPr/>
-          <a:lstStyle/>
-          <a:p>
-            <a:pPr>
-              <a:defRPr sz="1200" b="0" i="0" u="none" strike="noStrike">
-                <a:solidFill>
-                  <a:srgbClr val="56676A"/>
-                </a:solidFill>
-                <a:latin typeface="+mn-lt"/>
-              </a:defRPr>
-            </a:pPr>
-            <a:endParaRPr lang="en-US"/>
-          </a:p>
-        </c:txPr>
-        <c:crossAx val="2094734552"/>
-        <c:crosses val="autoZero"/>
-        <c:auto val="1"/>
-        <c:lblAlgn val="ctr"/>
-        <c:noMultiLvlLbl val="1"/>
-      </c:catAx>
-      <c:valAx>
-        <c:axId val="2094734552"/>
-        <c:scaling>
-          <c:orientation val="minMax"/>
-          <c:max val="0.7"/>
-          <c:min val="0"/>
-        </c:scaling>
-        <c:delete val="0"/>
-        <c:axPos val="b"/>
-        <c:majorGridlines>
-          <c:spPr>
-            <a:ln w="9525" cap="flat">
-              <a:solidFill>
-                <a:srgbClr val="E1E8E6"/>
-              </a:solidFill>
-              <a:prstDash val="solid"/>
-              <a:round/>
-            </a:ln>
-          </c:spPr>
-        </c:majorGridlines>
-        <c:numFmt formatCode="General" sourceLinked="0"/>
-        <c:majorTickMark val="out"/>
-        <c:minorTickMark val="none"/>
-        <c:tickLblPos val="low"/>
-        <c:spPr>
-          <a:ln w="12700" cap="flat">
-            <a:solidFill>
-              <a:srgbClr val="888888"/>
-            </a:solidFill>
-            <a:prstDash val="solid"/>
-            <a:round/>
-          </a:ln>
-        </c:spPr>
-        <c:txPr>
-          <a:bodyPr/>
-          <a:lstStyle/>
-          <a:p>
-            <a:pPr>
-              <a:defRPr sz="1100" b="0" i="0" u="none" strike="noStrike">
-                <a:solidFill>
-                  <a:srgbClr val="56676A"/>
-                </a:solidFill>
-                <a:latin typeface="+mn-lt"/>
-              </a:defRPr>
-            </a:pPr>
-            <a:endParaRPr lang="en-US"/>
-          </a:p>
-        </c:txPr>
-        <c:crossAx val="2094734554"/>
-        <c:crosses val="autoZero"/>
-        <c:crossBetween val="between"/>
-      </c:valAx>
-      <c:spPr>
-        <a:noFill/>
-        <a:ln>
-          <a:noFill/>
-        </a:ln>
-        <a:effectLst/>
-      </c:spPr>
-    </c:plotArea>
-    <c:plotVisOnly val="1"/>
-    <c:dispBlanksAs val="span"/>
-  </c:chart>
-  <c:spPr>
-    <a:noFill/>
-    <a:ln>
-      <a:noFill/>
-    </a:ln>
-    <a:effectLst/>
-  </c:spPr>
-  <c:externalData r:id="rId1">
-    <c:autoUpdate val="0"/>
-  </c:externalData>
-</c:chartSpace>
-</file>
-
-<file path=ppt/charts/chart9.xml><?xml version="1.0" encoding="utf-8"?>
-<c:chartSpace xmlns:c="http://schemas.openxmlformats.org/drawingml/2006/chart" xmlns:a="http://schemas.openxmlformats.org/drawingml/2006/main" xmlns:r="http://schemas.openxmlformats.org/officeDocument/2006/relationships">
-  <c:date1904 val="0"/>
-  <c:roundedCorners val="1"/>
-  <c:chart>
-    <c:title>
-      <c:tx>
-        <c:rich>
-          <a:bodyPr/>
-          <a:lstStyle/>
-          <a:p>
-            <a:pPr>
-              <a:defRPr sz="1300" b="0" i="0" u="none" strike="noStrike">
-                <a:solidFill>
-                  <a:srgbClr val="0F3D3E"/>
-                </a:solidFill>
-                <a:latin typeface="+mn-lt"/>
-              </a:defRPr>
-            </a:pPr>
-            <a:r>
-              <a:rPr sz="1300" b="0" i="0" u="none" strike="noStrike">
-                <a:solidFill>
-                  <a:srgbClr val="0F3D3E"/>
-                </a:solidFill>
-                <a:latin typeface="+mn-lt"/>
-              </a:rPr>
-              <a:t>E-nose biner · XGBoost, dijelaskan pada seri uji</a:t>
-            </a:r>
-          </a:p>
-        </c:rich>
-      </c:tx>
-      <c:layout/>
-      <c:overlay val="0"/>
-    </c:title>
-    <c:autoTitleDeleted val="0"/>
-    <c:plotArea>
-      <c:layout/>
-      <c:barChart>
-        <c:barDir val="bar"/>
-        <c:grouping val="clustered"/>
-        <c:varyColors val="0"/>
-        <c:ser>
-          <c:idx val="0"/>
-          <c:order val="0"/>
-          <c:tx>
-            <c:strRef>
-              <c:f>Sheet1!$B$1</c:f>
-              <c:strCache>
-                <c:ptCount val="1"/>
-                <c:pt idx="0">
-                  <c:v>mean |SHAP|</c:v>
-                </c:pt>
-              </c:strCache>
-            </c:strRef>
-          </c:tx>
-          <c:spPr>
-            <a:solidFill>
-              <a:srgbClr val="E3A33B"/>
-            </a:solidFill>
-            <a:effectLst/>
-          </c:spPr>
-          <c:invertIfNegative val="0"/>
-          <c:dLbls>
-            <c:numFmt formatCode="0.00" sourceLinked="0"/>
-            <c:txPr>
-              <a:bodyPr/>
-              <a:lstStyle/>
-              <a:p>
-                <a:pPr>
-                  <a:defRPr b="0" i="0" strike="noStrike" sz="1100" u="none">
-                    <a:solidFill>
-                      <a:srgbClr val="16262B"/>
-                    </a:solidFill>
-                    <a:latin typeface="+mn-lt"/>
-                  </a:defRPr>
-                </a:pPr>
-              </a:p>
-            </c:txPr>
-            <c:showLegendKey val="0"/>
-            <c:showVal val="1"/>
-            <c:showCatName val="0"/>
-            <c:showSerName val="0"/>
-            <c:showPercent val="0"/>
-            <c:showBubbleSize val="0"/>
-            <c:showLeaderLines val="0"/>
-          </c:dLbls>
-          <c:cat>
-            <c:multiLvlStrRef>
-              <c:f>Sheet1!$A$2:$A$11</c:f>
-              <c:multiLvlStrCache>
-                <c:ptCount val="10"/>
-                <c:lvl>
-                  <c:pt idx="0">
-                    <c:v>MQ4</c:v>
-                  </c:pt>
-                  <c:pt idx="1">
-                    <c:v>MQ8</c:v>
-                  </c:pt>
-                  <c:pt idx="2">
-                    <c:v>MQ3</c:v>
-                  </c:pt>
-                  <c:pt idx="3">
-                    <c:v>MQ9</c:v>
-                  </c:pt>
-                  <c:pt idx="4">
-                    <c:v>MQ136</c:v>
-                  </c:pt>
-                  <c:pt idx="5">
-                    <c:v>MQ2</c:v>
-                  </c:pt>
-                  <c:pt idx="6">
-                    <c:v>MQ5</c:v>
-                  </c:pt>
-                  <c:pt idx="7">
-                    <c:v>MQ135</c:v>
-                  </c:pt>
-                  <c:pt idx="8">
-                    <c:v>MQ6</c:v>
-                  </c:pt>
-                  <c:pt idx="9">
-                    <c:v>Humidity</c:v>
-                  </c:pt>
-                </c:lvl>
-              </c:multiLvlStrCache>
-            </c:multiLvlStrRef>
-          </c:cat>
-          <c:val>
-            <c:numRef>
-              <c:f>Sheet1!$B$2:$B$11</c:f>
-              <c:numCache>
-                <c:formatCode>General</c:formatCode>
-                <c:ptCount val="10"/>
-                <c:pt idx="0">
-                  <c:v>4.22</c:v>
-                </c:pt>
-                <c:pt idx="1">
-                  <c:v>3.238</c:v>
-                </c:pt>
-                <c:pt idx="2">
-                  <c:v>1.426</c:v>
-                </c:pt>
-                <c:pt idx="3">
-                  <c:v>0.862</c:v>
-                </c:pt>
-                <c:pt idx="4">
-                  <c:v>0.574</c:v>
-                </c:pt>
-                <c:pt idx="5">
-                  <c:v>0.511</c:v>
-                </c:pt>
-                <c:pt idx="6">
-                  <c:v>0.308</c:v>
-                </c:pt>
-                <c:pt idx="7">
-                  <c:v>0.255</c:v>
-                </c:pt>
-                <c:pt idx="8">
-                  <c:v>0.242</c:v>
-                </c:pt>
-                <c:pt idx="9">
-                  <c:v>0.119</c:v>
-                </c:pt>
-              </c:numCache>
-            </c:numRef>
-          </c:val>
-        </c:ser>
-        <c:dLbls>
-          <c:numFmt formatCode="0.00" sourceLinked="0"/>
-          <c:txPr>
-            <a:bodyPr/>
-            <a:lstStyle/>
-            <a:p>
-              <a:pPr>
-                <a:defRPr b="0" i="0" strike="noStrike" sz="1100" u="none">
-                  <a:solidFill>
-                    <a:srgbClr val="16262B"/>
-                  </a:solidFill>
-                  <a:latin typeface="+mn-lt"/>
-                </a:defRPr>
-              </a:pPr>
-            </a:p>
-          </c:txPr>
-          <c:showLegendKey val="0"/>
-          <c:showVal val="1"/>
-          <c:showCatName val="0"/>
-          <c:showSerName val="0"/>
-          <c:showPercent val="0"/>
-          <c:showBubbleSize val="0"/>
-          <c:showLeaderLines val="0"/>
-        </c:dLbls>
-        <c:gapWidth val="150"/>
-        <c:overlap val="0"/>
-        <c:axId val="2094734554"/>
-        <c:axId val="2094734552"/>
-        <c:axId val="2094734556"/>
-      </c:barChart>
-      <c:catAx>
-        <c:axId val="2094734554"/>
-        <c:scaling>
-          <c:orientation val="maxMin"/>
-        </c:scaling>
-        <c:delete val="0"/>
-        <c:axPos val="l"/>
-        <c:numFmt formatCode="General" sourceLinked="1"/>
-        <c:majorTickMark val="out"/>
-        <c:minorTickMark val="none"/>
-        <c:tickLblPos val="nextTo"/>
-        <c:spPr>
-          <a:ln w="12700" cap="flat">
-            <a:solidFill>
-              <a:srgbClr val="888888"/>
-            </a:solidFill>
-            <a:prstDash val="solid"/>
-            <a:round/>
-          </a:ln>
-        </c:spPr>
-        <c:txPr>
-          <a:bodyPr/>
-          <a:lstStyle/>
-          <a:p>
-            <a:pPr>
-              <a:defRPr sz="1200" b="0" i="0" u="none" strike="noStrike">
-                <a:solidFill>
-                  <a:srgbClr val="56676A"/>
-                </a:solidFill>
-                <a:latin typeface="+mn-lt"/>
-              </a:defRPr>
-            </a:pPr>
-            <a:endParaRPr lang="en-US"/>
-          </a:p>
-        </c:txPr>
-        <c:crossAx val="2094734552"/>
-        <c:crosses val="autoZero"/>
-        <c:auto val="1"/>
-        <c:lblAlgn val="ctr"/>
-        <c:noMultiLvlLbl val="1"/>
-      </c:catAx>
-      <c:valAx>
-        <c:axId val="2094734552"/>
-        <c:scaling>
-          <c:orientation val="minMax"/>
-          <c:max val="5"/>
-          <c:min val="0"/>
-        </c:scaling>
-        <c:delete val="0"/>
-        <c:axPos val="b"/>
-        <c:majorGridlines>
-          <c:spPr>
-            <a:ln w="9525" cap="flat">
-              <a:solidFill>
-                <a:srgbClr val="E1E8E6"/>
-              </a:solidFill>
-              <a:prstDash val="solid"/>
-              <a:round/>
-            </a:ln>
-          </c:spPr>
-        </c:majorGridlines>
-        <c:numFmt formatCode="General" sourceLinked="0"/>
-        <c:majorTickMark val="out"/>
-        <c:minorTickMark val="none"/>
-        <c:tickLblPos val="low"/>
-        <c:spPr>
-          <a:ln w="12700" cap="flat">
-            <a:solidFill>
-              <a:srgbClr val="888888"/>
-            </a:solidFill>
-            <a:prstDash val="solid"/>
-            <a:round/>
-          </a:ln>
-        </c:spPr>
-        <c:txPr>
-          <a:bodyPr/>
-          <a:lstStyle/>
-          <a:p>
-            <a:pPr>
-              <a:defRPr sz="1100" b="0" i="0" u="none" strike="noStrike">
-                <a:solidFill>
-                  <a:srgbClr val="56676A"/>
-                </a:solidFill>
-                <a:latin typeface="+mn-lt"/>
-              </a:defRPr>
-            </a:pPr>
-            <a:endParaRPr lang="en-US"/>
-          </a:p>
-        </c:txPr>
-        <c:crossAx val="2094734554"/>
-        <c:crosses val="autoZero"/>
-        <c:crossBetween val="between"/>
-      </c:valAx>
-      <c:spPr>
-        <a:noFill/>
-        <a:ln>
-          <a:noFill/>
-        </a:ln>
-        <a:effectLst/>
-      </c:spPr>
-    </c:plotArea>
-    <c:plotVisOnly val="1"/>
-    <c:dispBlanksAs val="span"/>
-  </c:chart>
-  <c:spPr>
-    <a:noFill/>
-    <a:ln>
-      <a:noFill/>
-    </a:ln>
-    <a:effectLst/>
-  </c:spPr>
-  <c:externalData r:id="rId1">
-    <c:autoUpdate val="0"/>
-  </c:externalData>
-</c:chartSpace>
 </file>
 
 <file path=ppt/notesMasters/notesMaster1.xml><?xml version="1.0" encoding="utf-8"?>
@@ -7674,7 +2681,7 @@
                   <a:schemeClr val="tx2"/>
                 </a:solidFill>
               </a:rPr>
-              <a:t>₳</a:t>
+              <a:t>Rp</a:t>
             </a:r>
             <a:endParaRPr lang="en-US" sz="1600" dirty="0"/>
           </a:p>
@@ -7972,28 +2979,36 @@
                 <a:ea typeface="Cambria" pitchFamily="34" charset="-122"/>
                 <a:cs typeface="Cambria" pitchFamily="34" charset="-120"/>
               </a:rPr>
-              <a:t>Imbalanced regression: ekstrem membaik, tengah memburuk</a:t>
+              <a:t>Bobot imbalance: ekstrem membaik, tengah memburuk</a:t>
             </a:r>
             <a:endParaRPr lang="en-US" sz="3200" dirty="0"/>
           </a:p>
         </p:txBody>
       </p:sp>
-      <p:graphicFrame>
-        <p:nvGraphicFramePr>
-          <p:cNvPr id="3" name="Chart 0" descr=""/>
-          <p:cNvGraphicFramePr/>
-          <p:nvPr/>
-        </p:nvGraphicFramePr>
-        <p:xfrm>
-          <a:off x="548640" y="1234440"/>
-          <a:ext cx="6949440" cy="4206240"/>
-        </p:xfrm>
-        <a:graphic xmlns:a="http://schemas.openxmlformats.org/drawingml/2006/main">
-          <a:graphicData uri="http://schemas.openxmlformats.org/drawingml/2006/chart">
-            <c:chart xmlns:c="http://schemas.openxmlformats.org/drawingml/2006/chart" r:id="rId1"/>
-          </a:graphicData>
-        </a:graphic>
-      </p:graphicFrame>
+      <p:pic>
+        <p:nvPicPr>
+          <p:cNvPr id="3" name="Image 0" descr="/Users/angga0704/ets-ml2-kelompok/deck/figures/s10_sol_imbalance.png">    </p:cNvPr>
+          <p:cNvPicPr>
+            <a:picLocks noChangeAspect="1"/>
+          </p:cNvPicPr>
+          <p:nvPr/>
+        </p:nvPicPr>
+        <p:blipFill>
+          <a:blip r:embed="rId1"/>
+          <a:stretch>
+            <a:fillRect/>
+          </a:stretch>
+        </p:blipFill>
+        <p:spPr>
+          <a:xfrm>
+            <a:off x="991004" y="1234440"/>
+            <a:ext cx="6064711" cy="4206240"/>
+          </a:xfrm>
+          <a:prstGeom prst="rect">
+            <a:avLst/>
+          </a:prstGeom>
+        </p:spPr>
+      </p:pic>
       <p:sp>
         <p:nvSpPr>
           <p:cNvPr id="4" name="Shape 1"/>
@@ -8832,7 +3847,7 @@
           <a:ln/>
         </p:spPr>
         <p:txBody>
-          <a:bodyPr wrap="square" lIns="0" tIns="0" rIns="0" bIns="0" rtlCol="0" anchor="ctr"/>
+          <a:bodyPr wrap="square" lIns="0" tIns="0" rIns="0" bIns="0" rtlCol="0" anchor="t"/>
           <a:lstStyle/>
           <a:p>
             <a:pPr indent="0" marL="0">
@@ -9067,22 +4082,30 @@
           </a:p>
         </p:txBody>
       </p:sp>
-      <p:graphicFrame>
-        <p:nvGraphicFramePr>
-          <p:cNvPr id="3" name="Chart 0" descr=""/>
-          <p:cNvGraphicFramePr/>
-          <p:nvPr/>
-        </p:nvGraphicFramePr>
-        <p:xfrm>
-          <a:off x="548640" y="1234440"/>
-          <a:ext cx="7223760" cy="4480560"/>
-        </p:xfrm>
-        <a:graphic xmlns:a="http://schemas.openxmlformats.org/drawingml/2006/main">
-          <a:graphicData uri="http://schemas.openxmlformats.org/drawingml/2006/chart">
-            <c:chart xmlns:c="http://schemas.openxmlformats.org/drawingml/2006/chart" r:id="rId1"/>
-          </a:graphicData>
-        </a:graphic>
-      </p:graphicFrame>
+      <p:pic>
+        <p:nvPicPr>
+          <p:cNvPr id="3" name="Image 0" descr="/Users/angga0704/ets-ml2-kelompok/deck/figures/s12_al_solubility.png">    </p:cNvPr>
+          <p:cNvPicPr>
+            <a:picLocks noChangeAspect="1"/>
+          </p:cNvPicPr>
+          <p:nvPr/>
+        </p:nvPicPr>
+        <p:blipFill>
+          <a:blip r:embed="rId1"/>
+          <a:stretch>
+            <a:fillRect/>
+          </a:stretch>
+        </p:blipFill>
+        <p:spPr>
+          <a:xfrm>
+            <a:off x="1218824" y="1234440"/>
+            <a:ext cx="5883393" cy="4526280"/>
+          </a:xfrm>
+          <a:prstGeom prst="rect">
+            <a:avLst/>
+          </a:prstGeom>
+        </p:spPr>
+      </p:pic>
       <p:sp>
         <p:nvSpPr>
           <p:cNvPr id="4" name="Shape 1"/>
@@ -9372,38 +4395,54 @@
           </a:p>
         </p:txBody>
       </p:sp>
-      <p:graphicFrame>
-        <p:nvGraphicFramePr>
-          <p:cNvPr id="3" name="Chart 0" descr=""/>
-          <p:cNvGraphicFramePr/>
-          <p:nvPr/>
-        </p:nvGraphicFramePr>
-        <p:xfrm>
-          <a:off x="548640" y="1234440"/>
-          <a:ext cx="5669280" cy="4160520"/>
-        </p:xfrm>
-        <a:graphic xmlns:a="http://schemas.openxmlformats.org/drawingml/2006/main">
-          <a:graphicData uri="http://schemas.openxmlformats.org/drawingml/2006/chart">
-            <c:chart xmlns:c="http://schemas.openxmlformats.org/drawingml/2006/chart" r:id="rId1"/>
-          </a:graphicData>
-        </a:graphic>
-      </p:graphicFrame>
-      <p:graphicFrame>
-        <p:nvGraphicFramePr>
-          <p:cNvPr id="4" name="Chart 1" descr=""/>
-          <p:cNvGraphicFramePr/>
-          <p:nvPr/>
-        </p:nvGraphicFramePr>
-        <p:xfrm>
-          <a:off x="6446520" y="1234440"/>
-          <a:ext cx="5196535" cy="4160520"/>
-        </p:xfrm>
-        <a:graphic xmlns:a="http://schemas.openxmlformats.org/drawingml/2006/main">
-          <a:graphicData uri="http://schemas.openxmlformats.org/drawingml/2006/chart">
-            <c:chart xmlns:c="http://schemas.openxmlformats.org/drawingml/2006/chart" r:id="rId2"/>
-          </a:graphicData>
-        </a:graphic>
-      </p:graphicFrame>
+      <p:pic>
+        <p:nvPicPr>
+          <p:cNvPr id="3" name="Image 0" descr="/Users/angga0704/ets-ml2-kelompok/deck/figures/s13_al_enose.png">    </p:cNvPr>
+          <p:cNvPicPr>
+            <a:picLocks noChangeAspect="1"/>
+          </p:cNvPicPr>
+          <p:nvPr/>
+        </p:nvPicPr>
+        <p:blipFill>
+          <a:blip r:embed="rId1"/>
+          <a:stretch>
+            <a:fillRect/>
+          </a:stretch>
+        </p:blipFill>
+        <p:spPr>
+          <a:xfrm>
+            <a:off x="743885" y="1234440"/>
+            <a:ext cx="5370231" cy="4206240"/>
+          </a:xfrm>
+          <a:prstGeom prst="rect">
+            <a:avLst/>
+          </a:prstGeom>
+        </p:spPr>
+      </p:pic>
+      <p:pic>
+        <p:nvPicPr>
+          <p:cNvPr id="4" name="Image 1" descr="/Users/angga0704/ets-ml2-kelompok/deck/figures/s13_series_curve.png">    </p:cNvPr>
+          <p:cNvPicPr>
+            <a:picLocks noChangeAspect="1"/>
+          </p:cNvPicPr>
+          <p:nvPr/>
+        </p:nvPicPr>
+        <p:blipFill>
+          <a:blip r:embed="rId2"/>
+          <a:stretch>
+            <a:fillRect/>
+          </a:stretch>
+        </p:blipFill>
+        <p:spPr>
+          <a:xfrm>
+            <a:off x="6537960" y="1514312"/>
+            <a:ext cx="5105095" cy="3646497"/>
+          </a:xfrm>
+          <a:prstGeom prst="rect">
+            <a:avLst/>
+          </a:prstGeom>
+        </p:spPr>
+      </p:pic>
       <p:sp>
         <p:nvSpPr>
           <p:cNvPr id="5" name="Text 1"/>
@@ -9565,38 +4604,54 @@
           </a:p>
         </p:txBody>
       </p:sp>
-      <p:graphicFrame>
-        <p:nvGraphicFramePr>
-          <p:cNvPr id="3" name="Chart 0" descr=""/>
-          <p:cNvGraphicFramePr/>
-          <p:nvPr/>
-        </p:nvGraphicFramePr>
-        <p:xfrm>
-          <a:off x="548640" y="1234440"/>
-          <a:ext cx="5394960" cy="3931920"/>
-        </p:xfrm>
-        <a:graphic xmlns:a="http://schemas.openxmlformats.org/drawingml/2006/main">
-          <a:graphicData uri="http://schemas.openxmlformats.org/drawingml/2006/chart">
-            <c:chart xmlns:c="http://schemas.openxmlformats.org/drawingml/2006/chart" r:id="rId1"/>
-          </a:graphicData>
-        </a:graphic>
-      </p:graphicFrame>
-      <p:graphicFrame>
-        <p:nvGraphicFramePr>
-          <p:cNvPr id="4" name="Chart 1" descr=""/>
-          <p:cNvGraphicFramePr/>
-          <p:nvPr/>
-        </p:nvGraphicFramePr>
-        <p:xfrm>
-          <a:off x="6245352" y="1234440"/>
-          <a:ext cx="5397703" cy="3931920"/>
-        </p:xfrm>
-        <a:graphic xmlns:a="http://schemas.openxmlformats.org/drawingml/2006/main">
-          <a:graphicData uri="http://schemas.openxmlformats.org/drawingml/2006/chart">
-            <c:chart xmlns:c="http://schemas.openxmlformats.org/drawingml/2006/chart" r:id="rId2"/>
-          </a:graphicData>
-        </a:graphic>
-      </p:graphicFrame>
+      <p:pic>
+        <p:nvPicPr>
+          <p:cNvPr id="3" name="Image 0" descr="/Users/angga0704/ets-ml2-kelompok/deck/figures/s14_shap_sol.png">    </p:cNvPr>
+          <p:cNvPicPr>
+            <a:picLocks noChangeAspect="1"/>
+          </p:cNvPicPr>
+          <p:nvPr/>
+        </p:nvPicPr>
+        <p:blipFill>
+          <a:blip r:embed="rId1"/>
+          <a:stretch>
+            <a:fillRect/>
+          </a:stretch>
+        </p:blipFill>
+        <p:spPr>
+          <a:xfrm>
+            <a:off x="548640" y="1472931"/>
+            <a:ext cx="5394960" cy="3454939"/>
+          </a:xfrm>
+          <a:prstGeom prst="rect">
+            <a:avLst/>
+          </a:prstGeom>
+        </p:spPr>
+      </p:pic>
+      <p:pic>
+        <p:nvPicPr>
+          <p:cNvPr id="4" name="Image 1" descr="/Users/angga0704/ets-ml2-kelompok/deck/figures/s14_shap_enose.png">    </p:cNvPr>
+          <p:cNvPicPr>
+            <a:picLocks noChangeAspect="1"/>
+          </p:cNvPicPr>
+          <p:nvPr/>
+        </p:nvPicPr>
+        <p:blipFill>
+          <a:blip r:embed="rId2"/>
+          <a:stretch>
+            <a:fillRect/>
+          </a:stretch>
+        </p:blipFill>
+        <p:spPr>
+          <a:xfrm>
+            <a:off x="6248156" y="1234440"/>
+            <a:ext cx="5392096" cy="3931920"/>
+          </a:xfrm>
+          <a:prstGeom prst="rect">
+            <a:avLst/>
+          </a:prstGeom>
+        </p:spPr>
+      </p:pic>
       <p:sp>
         <p:nvSpPr>
           <p:cNvPr id="5" name="Text 1"/>
@@ -10647,7 +5702,7 @@
                   <a:srgbClr val="CADBD7"/>
                 </a:solidFill>
               </a:rPr>
-              <a:t>Split acak 1,00 vs LOSO 0,57</a:t>
+              <a:t>Split acak 0,998 vs LOSO 0,572</a:t>
             </a:r>
             <a:endParaRPr lang="en-US" sz="1400" dirty="0"/>
           </a:p>
@@ -11097,7 +6152,7 @@
           <a:ln/>
         </p:spPr>
         <p:txBody>
-          <a:bodyPr wrap="square" lIns="0" tIns="0" rIns="0" bIns="0" rtlCol="0" anchor="ctr"/>
+          <a:bodyPr wrap="square" lIns="0" tIns="0" rIns="0" bIns="0" rtlCol="0" anchor="t"/>
           <a:lstStyle/>
           <a:p>
             <a:pPr indent="0" marL="0">
@@ -12324,7 +7379,7 @@
                 <a:ea typeface="Cambria" pitchFamily="34" charset="-122"/>
                 <a:cs typeface="Cambria" pitchFamily="34" charset="-120"/>
               </a:rPr>
-              <a:t>Mutu kuning telur puyuh</a:t>
+              <a:t>Kuning telur puyuh</a:t>
             </a:r>
             <a:endParaRPr lang="en-US" sz="2100" dirty="0"/>
           </a:p>
@@ -13992,7 +9047,7 @@
                   <a:schemeClr val="tx1"/>
                 </a:solidFill>
               </a:rPr>
-              <a:t>Leave-One-Series-Out dan scaffold split</a:t>
+              <a:t>LOSO per seri dan scaffold split</a:t>
             </a:r>
             <a:endParaRPr lang="en-US" sz="1250" dirty="0"/>
           </a:p>
@@ -14582,7 +9637,7 @@
                   <a:srgbClr val="56676A"/>
                 </a:solidFill>
               </a:rPr>
-              <a:t>Kode: github.com/MuhammadErlanggaKurniawan/ets-ml2-kelompok · 4 notebook Colab</a:t>
+              <a:t>Kode: github.com/MuhammadErlanggaKurniawan/ets-ml2-kelompok · 1 notebook Colab, 13 bagian berurutan</a:t>
             </a:r>
             <a:endParaRPr lang="en-US" sz="1300" dirty="0"/>
           </a:p>
@@ -17079,22 +12134,30 @@
           </a:p>
         </p:txBody>
       </p:sp>
-      <p:graphicFrame>
-        <p:nvGraphicFramePr>
-          <p:cNvPr id="3" name="Chart 0" descr=""/>
-          <p:cNvGraphicFramePr/>
-          <p:nvPr/>
-        </p:nvGraphicFramePr>
-        <p:xfrm>
-          <a:off x="548640" y="1234440"/>
-          <a:ext cx="6583680" cy="4023360"/>
-        </p:xfrm>
-        <a:graphic xmlns:a="http://schemas.openxmlformats.org/drawingml/2006/main">
-          <a:graphicData uri="http://schemas.openxmlformats.org/drawingml/2006/chart">
-            <c:chart xmlns:c="http://schemas.openxmlformats.org/drawingml/2006/chart" r:id="rId1"/>
-          </a:graphicData>
-        </a:graphic>
-      </p:graphicFrame>
+      <p:pic>
+        <p:nvPicPr>
+          <p:cNvPr id="3" name="Image 0" descr="/Users/angga0704/ets-ml2-kelompok/deck/figures/s07_augment.png">    </p:cNvPr>
+          <p:cNvPicPr>
+            <a:picLocks noChangeAspect="1"/>
+          </p:cNvPicPr>
+          <p:nvPr/>
+        </p:nvPicPr>
+        <p:blipFill>
+          <a:blip r:embed="rId1"/>
+          <a:stretch>
+            <a:fillRect/>
+          </a:stretch>
+        </p:blipFill>
+        <p:spPr>
+          <a:xfrm>
+            <a:off x="1241659" y="1234440"/>
+            <a:ext cx="5197642" cy="4114800"/>
+          </a:xfrm>
+          <a:prstGeom prst="rect">
+            <a:avLst/>
+          </a:prstGeom>
+        </p:spPr>
+      </p:pic>
       <p:sp>
         <p:nvSpPr>
           <p:cNvPr id="4" name="Shape 1"/>
@@ -18266,22 +13329,30 @@
           </a:p>
         </p:txBody>
       </p:sp>
-      <p:graphicFrame>
-        <p:nvGraphicFramePr>
-          <p:cNvPr id="3" name="Chart 0" descr=""/>
-          <p:cNvGraphicFramePr/>
-          <p:nvPr/>
-        </p:nvGraphicFramePr>
-        <p:xfrm>
-          <a:off x="548640" y="1234440"/>
-          <a:ext cx="6949440" cy="4480560"/>
-        </p:xfrm>
-        <a:graphic xmlns:a="http://schemas.openxmlformats.org/drawingml/2006/main">
-          <a:graphicData uri="http://schemas.openxmlformats.org/drawingml/2006/chart">
-            <c:chart xmlns:c="http://schemas.openxmlformats.org/drawingml/2006/chart" r:id="rId1"/>
-          </a:graphicData>
-        </a:graphic>
-      </p:graphicFrame>
+      <p:pic>
+        <p:nvPicPr>
+          <p:cNvPr id="3" name="Image 0" descr="/Users/angga0704/ets-ml2-kelompok/deck/figures/s08_enose_ensemble.png">    </p:cNvPr>
+          <p:cNvPicPr>
+            <a:picLocks noChangeAspect="1"/>
+          </p:cNvPicPr>
+          <p:nvPr/>
+        </p:nvPicPr>
+        <p:blipFill>
+          <a:blip r:embed="rId1"/>
+          <a:stretch>
+            <a:fillRect/>
+          </a:stretch>
+        </p:blipFill>
+        <p:spPr>
+          <a:xfrm>
+            <a:off x="1168166" y="1234440"/>
+            <a:ext cx="5710387" cy="4526280"/>
+          </a:xfrm>
+          <a:prstGeom prst="rect">
+            <a:avLst/>
+          </a:prstGeom>
+        </p:spPr>
+      </p:pic>
       <p:sp>
         <p:nvSpPr>
           <p:cNvPr id="4" name="Shape 1"/>
@@ -18571,22 +13642,30 @@
           </a:p>
         </p:txBody>
       </p:sp>
-      <p:graphicFrame>
-        <p:nvGraphicFramePr>
-          <p:cNvPr id="3" name="Chart 0" descr=""/>
-          <p:cNvGraphicFramePr/>
-          <p:nvPr/>
-        </p:nvGraphicFramePr>
-        <p:xfrm>
-          <a:off x="548640" y="1234440"/>
-          <a:ext cx="6949440" cy="4480560"/>
-        </p:xfrm>
-        <a:graphic xmlns:a="http://schemas.openxmlformats.org/drawingml/2006/main">
-          <a:graphicData uri="http://schemas.openxmlformats.org/drawingml/2006/chart">
-            <c:chart xmlns:c="http://schemas.openxmlformats.org/drawingml/2006/chart" r:id="rId1"/>
-          </a:graphicData>
-        </a:graphic>
-      </p:graphicFrame>
+      <p:pic>
+        <p:nvPicPr>
+          <p:cNvPr id="3" name="Image 0" descr="/Users/angga0704/ets-ml2-kelompok/deck/figures/s09_sol_ensemble.png">    </p:cNvPr>
+          <p:cNvPicPr>
+            <a:picLocks noChangeAspect="1"/>
+          </p:cNvPicPr>
+          <p:nvPr/>
+        </p:nvPicPr>
+        <p:blipFill>
+          <a:blip r:embed="rId1"/>
+          <a:stretch>
+            <a:fillRect/>
+          </a:stretch>
+        </p:blipFill>
+        <p:spPr>
+          <a:xfrm>
+            <a:off x="548640" y="1485155"/>
+            <a:ext cx="6949440" cy="4024850"/>
+          </a:xfrm>
+          <a:prstGeom prst="rect">
+            <a:avLst/>
+          </a:prstGeom>
+        </p:spPr>
+      </p:pic>
       <p:sp>
         <p:nvSpPr>
           <p:cNvPr id="4" name="Shape 1"/>
